--- a/05_原始归档/组会汇报文件/第二次汇报（贺）.pptx
+++ b/05_原始归档/组会汇报文件/第二次汇报（贺）.pptx
@@ -1,20 +1,22 @@
 
 <file path=ppt/presentation.xml><?xml version="1.0" encoding="utf-8"?>
-<p:presentation xmlns:a="http://schemas.openxmlformats.org/drawingml/2006/main" xmlns:r="http://schemas.openxmlformats.org/officeDocument/2006/relationships" xmlns:p="http://schemas.openxmlformats.org/presentationml/2006/main" saveSubsetFonts="1">
+<p:presentation xmlns:a="http://schemas.openxmlformats.org/drawingml/2006/main" xmlns:r="http://schemas.openxmlformats.org/officeDocument/2006/relationships" xmlns:p="http://schemas.openxmlformats.org/presentationml/2006/main">
   <p:sldMasterIdLst>
-    <p:sldMasterId id="2147483660" r:id="rId1"/>
+    <p:sldMasterId id="2147483648" r:id="rId1"/>
   </p:sldMasterIdLst>
   <p:notesMasterIdLst>
-    <p:notesMasterId r:id="rId6"/>
+    <p:notesMasterId r:id="rId5"/>
   </p:notesMasterIdLst>
   <p:sldIdLst>
-    <p:sldId id="258" r:id="rId2"/>
-    <p:sldId id="268" r:id="rId3"/>
+    <p:sldId id="258" r:id="rId3"/>
     <p:sldId id="271" r:id="rId4"/>
-    <p:sldId id="267" r:id="rId5"/>
+    <p:sldId id="272" r:id="rId6"/>
   </p:sldIdLst>
   <p:sldSz cx="12192000" cy="6858000"/>
   <p:notesSz cx="6858000" cy="9144000"/>
+  <p:custDataLst>
+    <p:tags r:id="rId10"/>
+  </p:custDataLst>
   <p:defaultTextStyle>
     <a:defPPr>
       <a:defRPr lang="en-US"/>
@@ -120,9 +122,8 @@
         </p14:section>
         <p14:section name="无标题节" id="{943D4C5D-4DB9-4B65-8839-CF3D5717A424}">
           <p14:sldIdLst>
-            <p14:sldId id="268"/>
             <p14:sldId id="271"/>
-            <p14:sldId id="267"/>
+            <p14:sldId id="272"/>
           </p14:sldIdLst>
         </p14:section>
       </p14:sectionLst>
@@ -227,7 +228,6 @@
           <a:p>
             <a:fld id="{EB41636D-AAC5-4849-957E-B9FE1ECC7ED7}" type="datetimeFigureOut">
               <a:rPr lang="zh-CN" altLang="en-US" smtClean="0"/>
-              <a:t>2026/9/19</a:t>
             </a:fld>
             <a:endParaRPr lang="zh-CN" altLang="en-US"/>
           </a:p>
@@ -294,6 +294,7 @@
               <a:rPr lang="zh-CN" altLang="en-US"/>
               <a:t>单击此处编辑母版文本样式</a:t>
             </a:r>
+            <a:endParaRPr lang="zh-CN" altLang="en-US"/>
           </a:p>
           <a:p>
             <a:pPr lvl="1"/>
@@ -301,6 +302,7 @@
               <a:rPr lang="zh-CN" altLang="en-US"/>
               <a:t>二级</a:t>
             </a:r>
+            <a:endParaRPr lang="zh-CN" altLang="en-US"/>
           </a:p>
           <a:p>
             <a:pPr lvl="2"/>
@@ -308,6 +310,7 @@
               <a:rPr lang="zh-CN" altLang="en-US"/>
               <a:t>三级</a:t>
             </a:r>
+            <a:endParaRPr lang="zh-CN" altLang="en-US"/>
           </a:p>
           <a:p>
             <a:pPr lvl="3"/>
@@ -315,6 +318,7 @@
               <a:rPr lang="zh-CN" altLang="en-US"/>
               <a:t>四级</a:t>
             </a:r>
+            <a:endParaRPr lang="zh-CN" altLang="en-US"/>
           </a:p>
           <a:p>
             <a:pPr lvl="4"/>
@@ -322,6 +326,7 @@
               <a:rPr lang="zh-CN" altLang="en-US"/>
               <a:t>五级</a:t>
             </a:r>
+            <a:endParaRPr lang="zh-CN" altLang="en-US"/>
           </a:p>
         </p:txBody>
       </p:sp>
@@ -385,18 +390,12 @@
           <a:p>
             <a:fld id="{70B2D630-D7B4-437C-AAF2-A4944786EB79}" type="slidenum">
               <a:rPr lang="zh-CN" altLang="en-US" smtClean="0"/>
-              <a:t>‹#›</a:t>
             </a:fld>
             <a:endParaRPr lang="zh-CN" altLang="en-US"/>
           </a:p>
         </p:txBody>
       </p:sp>
     </p:spTree>
-    <p:extLst>
-      <p:ext uri="{BB962C8B-B14F-4D97-AF65-F5344CB8AC3E}">
-        <p14:creationId xmlns:p14="http://schemas.microsoft.com/office/powerpoint/2010/main" val="482442270"/>
-      </p:ext>
-    </p:extLst>
   </p:cSld>
   <p:clrMap bg1="lt1" tx1="dk1" bg2="lt2" tx2="dk2" accent1="accent1" accent2="accent2" accent3="accent3" accent4="accent4" accent5="accent5" accent6="accent6" hlink="hlink" folHlink="folHlink"/>
   <p:notesStyle>
@@ -499,13 +498,7 @@
   <p:cSld>
     <p:spTree>
       <p:nvGrpSpPr>
-        <p:cNvPr id="1" name="">
-          <a:extLst>
-            <a:ext uri="{FF2B5EF4-FFF2-40B4-BE49-F238E27FC236}">
-              <a16:creationId xmlns:a16="http://schemas.microsoft.com/office/drawing/2014/main" id="{B250F9F9-5C2F-9C85-394C-C771DAA9310B}"/>
-            </a:ext>
-          </a:extLst>
-        </p:cNvPr>
+        <p:cNvPr id="1" name=""/>
         <p:cNvGrpSpPr/>
         <p:nvPr/>
       </p:nvGrpSpPr>
@@ -519,13 +512,7 @@
       </p:grpSpPr>
       <p:sp>
         <p:nvSpPr>
-          <p:cNvPr id="2" name="幻灯片图像占位符 1">
-            <a:extLst>
-              <a:ext uri="{FF2B5EF4-FFF2-40B4-BE49-F238E27FC236}">
-                <a16:creationId xmlns:a16="http://schemas.microsoft.com/office/drawing/2014/main" id="{63DB08D7-43B7-0968-E4D9-AE7263C04690}"/>
-              </a:ext>
-            </a:extLst>
-          </p:cNvPr>
+          <p:cNvPr id="2" name="幻灯片图像占位符 1"/>
           <p:cNvSpPr>
             <a:spLocks noGrp="1" noRot="1" noChangeAspect="1"/>
           </p:cNvSpPr>
@@ -537,13 +524,7 @@
       </p:sp>
       <p:sp>
         <p:nvSpPr>
-          <p:cNvPr id="3" name="备注占位符 2">
-            <a:extLst>
-              <a:ext uri="{FF2B5EF4-FFF2-40B4-BE49-F238E27FC236}">
-                <a16:creationId xmlns:a16="http://schemas.microsoft.com/office/drawing/2014/main" id="{3D0D0876-5AA4-564A-82A1-D54368B0EA45}"/>
-              </a:ext>
-            </a:extLst>
-          </p:cNvPr>
+          <p:cNvPr id="3" name="备注占位符 2"/>
           <p:cNvSpPr>
             <a:spLocks noGrp="1"/>
           </p:cNvSpPr>
@@ -562,13 +543,7 @@
       </p:sp>
       <p:sp>
         <p:nvSpPr>
-          <p:cNvPr id="4" name="灯片编号占位符 3">
-            <a:extLst>
-              <a:ext uri="{FF2B5EF4-FFF2-40B4-BE49-F238E27FC236}">
-                <a16:creationId xmlns:a16="http://schemas.microsoft.com/office/drawing/2014/main" id="{D2DCB80B-2FAC-342A-FB7C-2FD3E903D552}"/>
-              </a:ext>
-            </a:extLst>
-          </p:cNvPr>
+          <p:cNvPr id="4" name="灯片编号占位符 3"/>
           <p:cNvSpPr>
             <a:spLocks noGrp="1"/>
           </p:cNvSpPr>
@@ -583,18 +558,12 @@
           <a:p>
             <a:fld id="{70B2D630-D7B4-437C-AAF2-A4944786EB79}" type="slidenum">
               <a:rPr lang="zh-CN" altLang="en-US" smtClean="0"/>
-              <a:t>2</a:t>
             </a:fld>
             <a:endParaRPr lang="zh-CN" altLang="en-US"/>
           </a:p>
         </p:txBody>
       </p:sp>
     </p:spTree>
-    <p:extLst>
-      <p:ext uri="{BB962C8B-B14F-4D97-AF65-F5344CB8AC3E}">
-        <p14:creationId xmlns:p14="http://schemas.microsoft.com/office/powerpoint/2010/main" val="966854288"/>
-      </p:ext>
-    </p:extLst>
   </p:cSld>
   <p:clrMapOvr>
     <a:masterClrMapping/>
@@ -607,13 +576,7 @@
   <p:cSld>
     <p:spTree>
       <p:nvGrpSpPr>
-        <p:cNvPr id="1" name="">
-          <a:extLst>
-            <a:ext uri="{FF2B5EF4-FFF2-40B4-BE49-F238E27FC236}">
-              <a16:creationId xmlns:a16="http://schemas.microsoft.com/office/drawing/2014/main" id="{67D0C04C-9B90-E48F-DB17-C15CE03FBB58}"/>
-            </a:ext>
-          </a:extLst>
-        </p:cNvPr>
+        <p:cNvPr id="1" name=""/>
         <p:cNvGrpSpPr/>
         <p:nvPr/>
       </p:nvGrpSpPr>
@@ -627,13 +590,7 @@
       </p:grpSpPr>
       <p:sp>
         <p:nvSpPr>
-          <p:cNvPr id="2" name="幻灯片图像占位符 1">
-            <a:extLst>
-              <a:ext uri="{FF2B5EF4-FFF2-40B4-BE49-F238E27FC236}">
-                <a16:creationId xmlns:a16="http://schemas.microsoft.com/office/drawing/2014/main" id="{780C8CD6-7A95-313D-59D3-11BC39B42064}"/>
-              </a:ext>
-            </a:extLst>
-          </p:cNvPr>
+          <p:cNvPr id="2" name="幻灯片图像占位符 1"/>
           <p:cNvSpPr>
             <a:spLocks noGrp="1" noRot="1" noChangeAspect="1"/>
           </p:cNvSpPr>
@@ -645,13 +602,7 @@
       </p:sp>
       <p:sp>
         <p:nvSpPr>
-          <p:cNvPr id="3" name="备注占位符 2">
-            <a:extLst>
-              <a:ext uri="{FF2B5EF4-FFF2-40B4-BE49-F238E27FC236}">
-                <a16:creationId xmlns:a16="http://schemas.microsoft.com/office/drawing/2014/main" id="{41A0FAB3-5978-6751-0BA9-D7A71D09B0FA}"/>
-              </a:ext>
-            </a:extLst>
-          </p:cNvPr>
+          <p:cNvPr id="3" name="备注占位符 2"/>
           <p:cNvSpPr>
             <a:spLocks noGrp="1"/>
           </p:cNvSpPr>
@@ -670,13 +621,7 @@
       </p:sp>
       <p:sp>
         <p:nvSpPr>
-          <p:cNvPr id="4" name="灯片编号占位符 3">
-            <a:extLst>
-              <a:ext uri="{FF2B5EF4-FFF2-40B4-BE49-F238E27FC236}">
-                <a16:creationId xmlns:a16="http://schemas.microsoft.com/office/drawing/2014/main" id="{EAC51590-D2DE-34EE-9113-0A9CA6F47619}"/>
-              </a:ext>
-            </a:extLst>
-          </p:cNvPr>
+          <p:cNvPr id="4" name="灯片编号占位符 3"/>
           <p:cNvSpPr>
             <a:spLocks noGrp="1"/>
           </p:cNvSpPr>
@@ -691,126 +636,12 @@
           <a:p>
             <a:fld id="{70B2D630-D7B4-437C-AAF2-A4944786EB79}" type="slidenum">
               <a:rPr lang="zh-CN" altLang="en-US" smtClean="0"/>
-              <a:t>3</a:t>
             </a:fld>
             <a:endParaRPr lang="zh-CN" altLang="en-US"/>
           </a:p>
         </p:txBody>
       </p:sp>
     </p:spTree>
-    <p:extLst>
-      <p:ext uri="{BB962C8B-B14F-4D97-AF65-F5344CB8AC3E}">
-        <p14:creationId xmlns:p14="http://schemas.microsoft.com/office/powerpoint/2010/main" val="2637857175"/>
-      </p:ext>
-    </p:extLst>
-  </p:cSld>
-  <p:clrMapOvr>
-    <a:masterClrMapping/>
-  </p:clrMapOvr>
-</p:notes>
-</file>
-
-<file path=ppt/notesSlides/notesSlide3.xml><?xml version="1.0" encoding="utf-8"?>
-<p:notes xmlns:a="http://schemas.openxmlformats.org/drawingml/2006/main" xmlns:r="http://schemas.openxmlformats.org/officeDocument/2006/relationships" xmlns:p="http://schemas.openxmlformats.org/presentationml/2006/main">
-  <p:cSld>
-    <p:spTree>
-      <p:nvGrpSpPr>
-        <p:cNvPr id="1" name="">
-          <a:extLst>
-            <a:ext uri="{FF2B5EF4-FFF2-40B4-BE49-F238E27FC236}">
-              <a16:creationId xmlns:a16="http://schemas.microsoft.com/office/drawing/2014/main" id="{D0FC0BB0-F3DF-9121-E65B-9A0BE8872E67}"/>
-            </a:ext>
-          </a:extLst>
-        </p:cNvPr>
-        <p:cNvGrpSpPr/>
-        <p:nvPr/>
-      </p:nvGrpSpPr>
-      <p:grpSpPr>
-        <a:xfrm>
-          <a:off x="0" y="0"/>
-          <a:ext cx="0" cy="0"/>
-          <a:chOff x="0" y="0"/>
-          <a:chExt cx="0" cy="0"/>
-        </a:xfrm>
-      </p:grpSpPr>
-      <p:sp>
-        <p:nvSpPr>
-          <p:cNvPr id="2" name="幻灯片图像占位符 1">
-            <a:extLst>
-              <a:ext uri="{FF2B5EF4-FFF2-40B4-BE49-F238E27FC236}">
-                <a16:creationId xmlns:a16="http://schemas.microsoft.com/office/drawing/2014/main" id="{552C7669-CE97-BF5B-0C74-1B6184197940}"/>
-              </a:ext>
-            </a:extLst>
-          </p:cNvPr>
-          <p:cNvSpPr>
-            <a:spLocks noGrp="1" noRot="1" noChangeAspect="1"/>
-          </p:cNvSpPr>
-          <p:nvPr>
-            <p:ph type="sldImg"/>
-          </p:nvPr>
-        </p:nvSpPr>
-        <p:spPr/>
-      </p:sp>
-      <p:sp>
-        <p:nvSpPr>
-          <p:cNvPr id="3" name="备注占位符 2">
-            <a:extLst>
-              <a:ext uri="{FF2B5EF4-FFF2-40B4-BE49-F238E27FC236}">
-                <a16:creationId xmlns:a16="http://schemas.microsoft.com/office/drawing/2014/main" id="{C5AFC1EC-0A40-BB9C-F712-70FDB32B73C9}"/>
-              </a:ext>
-            </a:extLst>
-          </p:cNvPr>
-          <p:cNvSpPr>
-            <a:spLocks noGrp="1"/>
-          </p:cNvSpPr>
-          <p:nvPr>
-            <p:ph type="body" idx="1"/>
-          </p:nvPr>
-        </p:nvSpPr>
-        <p:spPr/>
-        <p:txBody>
-          <a:bodyPr/>
-          <a:lstStyle/>
-          <a:p>
-            <a:endParaRPr lang="zh-CN" altLang="en-US" dirty="0"/>
-          </a:p>
-        </p:txBody>
-      </p:sp>
-      <p:sp>
-        <p:nvSpPr>
-          <p:cNvPr id="4" name="灯片编号占位符 3">
-            <a:extLst>
-              <a:ext uri="{FF2B5EF4-FFF2-40B4-BE49-F238E27FC236}">
-                <a16:creationId xmlns:a16="http://schemas.microsoft.com/office/drawing/2014/main" id="{1A1A8DC8-3320-535B-C614-371C97CAC497}"/>
-              </a:ext>
-            </a:extLst>
-          </p:cNvPr>
-          <p:cNvSpPr>
-            <a:spLocks noGrp="1"/>
-          </p:cNvSpPr>
-          <p:nvPr>
-            <p:ph type="sldNum" sz="quarter" idx="5"/>
-          </p:nvPr>
-        </p:nvSpPr>
-        <p:spPr/>
-        <p:txBody>
-          <a:bodyPr/>
-          <a:lstStyle/>
-          <a:p>
-            <a:fld id="{70B2D630-D7B4-437C-AAF2-A4944786EB79}" type="slidenum">
-              <a:rPr lang="zh-CN" altLang="en-US" smtClean="0"/>
-              <a:t>4</a:t>
-            </a:fld>
-            <a:endParaRPr lang="zh-CN" altLang="en-US"/>
-          </a:p>
-        </p:txBody>
-      </p:sp>
-    </p:spTree>
-    <p:extLst>
-      <p:ext uri="{BB962C8B-B14F-4D97-AF65-F5344CB8AC3E}">
-        <p14:creationId xmlns:p14="http://schemas.microsoft.com/office/powerpoint/2010/main" val="2524152583"/>
-      </p:ext>
-    </p:extLst>
   </p:cSld>
   <p:clrMapOvr>
     <a:masterClrMapping/>
@@ -987,19 +818,12 @@
           <a:p>
             <a:fld id="{57FFB729-98E4-45C8-8056-4A2E152BFB59}" type="slidenum">
               <a:rPr lang="en-US" altLang="zh-CN" smtClean="0"/>
-              <a:pPr/>
-              <a:t>‹#›</a:t>
             </a:fld>
             <a:endParaRPr lang="en-US" altLang="zh-CN"/>
           </a:p>
         </p:txBody>
       </p:sp>
     </p:spTree>
-    <p:extLst>
-      <p:ext uri="{BB962C8B-B14F-4D97-AF65-F5344CB8AC3E}">
-        <p14:creationId xmlns:p14="http://schemas.microsoft.com/office/powerpoint/2010/main" val="4120208292"/>
-      </p:ext>
-    </p:extLst>
   </p:cSld>
   <p:clrMapOvr>
     <a:masterClrMapping/>
@@ -1067,6 +891,7 @@
               <a:rPr lang="zh-CN" altLang="en-US"/>
               <a:t>单击此处编辑母版文本样式</a:t>
             </a:r>
+            <a:endParaRPr lang="zh-CN" altLang="en-US"/>
           </a:p>
           <a:p>
             <a:pPr lvl="1"/>
@@ -1074,6 +899,7 @@
               <a:rPr lang="zh-CN" altLang="en-US"/>
               <a:t>二级</a:t>
             </a:r>
+            <a:endParaRPr lang="zh-CN" altLang="en-US"/>
           </a:p>
           <a:p>
             <a:pPr lvl="2"/>
@@ -1081,6 +907,7 @@
               <a:rPr lang="zh-CN" altLang="en-US"/>
               <a:t>三级</a:t>
             </a:r>
+            <a:endParaRPr lang="zh-CN" altLang="en-US"/>
           </a:p>
           <a:p>
             <a:pPr lvl="3"/>
@@ -1088,6 +915,7 @@
               <a:rPr lang="zh-CN" altLang="en-US"/>
               <a:t>四级</a:t>
             </a:r>
+            <a:endParaRPr lang="zh-CN" altLang="en-US"/>
           </a:p>
           <a:p>
             <a:pPr lvl="4"/>
@@ -1154,19 +982,12 @@
           <a:p>
             <a:fld id="{64FF37F7-9725-41FB-8C7B-98AE2286EC33}" type="slidenum">
               <a:rPr lang="en-US" altLang="zh-CN" smtClean="0"/>
-              <a:pPr/>
-              <a:t>‹#›</a:t>
             </a:fld>
             <a:endParaRPr lang="en-US" altLang="zh-CN"/>
           </a:p>
         </p:txBody>
       </p:sp>
     </p:spTree>
-    <p:extLst>
-      <p:ext uri="{BB962C8B-B14F-4D97-AF65-F5344CB8AC3E}">
-        <p14:creationId xmlns:p14="http://schemas.microsoft.com/office/powerpoint/2010/main" val="1363667478"/>
-      </p:ext>
-    </p:extLst>
   </p:cSld>
   <p:clrMapOvr>
     <a:masterClrMapping/>
@@ -1244,6 +1065,7 @@
               <a:rPr lang="zh-CN" altLang="en-US"/>
               <a:t>单击此处编辑母版文本样式</a:t>
             </a:r>
+            <a:endParaRPr lang="zh-CN" altLang="en-US"/>
           </a:p>
           <a:p>
             <a:pPr lvl="1"/>
@@ -1251,6 +1073,7 @@
               <a:rPr lang="zh-CN" altLang="en-US"/>
               <a:t>二级</a:t>
             </a:r>
+            <a:endParaRPr lang="zh-CN" altLang="en-US"/>
           </a:p>
           <a:p>
             <a:pPr lvl="2"/>
@@ -1258,6 +1081,7 @@
               <a:rPr lang="zh-CN" altLang="en-US"/>
               <a:t>三级</a:t>
             </a:r>
+            <a:endParaRPr lang="zh-CN" altLang="en-US"/>
           </a:p>
           <a:p>
             <a:pPr lvl="3"/>
@@ -1265,6 +1089,7 @@
               <a:rPr lang="zh-CN" altLang="en-US"/>
               <a:t>四级</a:t>
             </a:r>
+            <a:endParaRPr lang="zh-CN" altLang="en-US"/>
           </a:p>
           <a:p>
             <a:pPr lvl="4"/>
@@ -1331,19 +1156,12 @@
           <a:p>
             <a:fld id="{9743C1FE-659A-47A6-9E9F-02B6D8A8F582}" type="slidenum">
               <a:rPr lang="en-US" altLang="zh-CN" smtClean="0"/>
-              <a:pPr/>
-              <a:t>‹#›</a:t>
             </a:fld>
             <a:endParaRPr lang="en-US" altLang="zh-CN"/>
           </a:p>
         </p:txBody>
       </p:sp>
     </p:spTree>
-    <p:extLst>
-      <p:ext uri="{BB962C8B-B14F-4D97-AF65-F5344CB8AC3E}">
-        <p14:creationId xmlns:p14="http://schemas.microsoft.com/office/powerpoint/2010/main" val="4254144856"/>
-      </p:ext>
-    </p:extLst>
   </p:cSld>
   <p:clrMapOvr>
     <a:masterClrMapping/>
@@ -1411,6 +1229,7 @@
               <a:rPr lang="zh-CN" altLang="en-US"/>
               <a:t>单击此处编辑母版文本样式</a:t>
             </a:r>
+            <a:endParaRPr lang="zh-CN" altLang="en-US"/>
           </a:p>
           <a:p>
             <a:pPr lvl="1"/>
@@ -1418,6 +1237,7 @@
               <a:rPr lang="zh-CN" altLang="en-US"/>
               <a:t>二级</a:t>
             </a:r>
+            <a:endParaRPr lang="zh-CN" altLang="en-US"/>
           </a:p>
           <a:p>
             <a:pPr lvl="2"/>
@@ -1425,6 +1245,7 @@
               <a:rPr lang="zh-CN" altLang="en-US"/>
               <a:t>三级</a:t>
             </a:r>
+            <a:endParaRPr lang="zh-CN" altLang="en-US"/>
           </a:p>
           <a:p>
             <a:pPr lvl="3"/>
@@ -1432,6 +1253,7 @@
               <a:rPr lang="zh-CN" altLang="en-US"/>
               <a:t>四级</a:t>
             </a:r>
+            <a:endParaRPr lang="zh-CN" altLang="en-US"/>
           </a:p>
           <a:p>
             <a:pPr lvl="4"/>
@@ -1498,19 +1320,12 @@
           <a:p>
             <a:fld id="{77900A9C-7B46-4957-BFE6-1F507F26FF94}" type="slidenum">
               <a:rPr lang="en-US" altLang="zh-CN" smtClean="0"/>
-              <a:pPr/>
-              <a:t>‹#›</a:t>
             </a:fld>
             <a:endParaRPr lang="en-US" altLang="zh-CN"/>
           </a:p>
         </p:txBody>
       </p:sp>
     </p:spTree>
-    <p:extLst>
-      <p:ext uri="{BB962C8B-B14F-4D97-AF65-F5344CB8AC3E}">
-        <p14:creationId xmlns:p14="http://schemas.microsoft.com/office/powerpoint/2010/main" val="378813233"/>
-      </p:ext>
-    </p:extLst>
   </p:cSld>
   <p:clrMapOvr>
     <a:masterClrMapping/>
@@ -1683,6 +1498,7 @@
               <a:rPr lang="zh-CN" altLang="en-US"/>
               <a:t>单击此处编辑母版文本样式</a:t>
             </a:r>
+            <a:endParaRPr lang="zh-CN" altLang="en-US"/>
           </a:p>
         </p:txBody>
       </p:sp>
@@ -1741,19 +1557,12 @@
           <a:p>
             <a:fld id="{439CB2D8-1267-4C19-809C-09C5DF8F1A39}" type="slidenum">
               <a:rPr lang="en-US" altLang="zh-CN" smtClean="0"/>
-              <a:pPr/>
-              <a:t>‹#›</a:t>
             </a:fld>
             <a:endParaRPr lang="en-US" altLang="zh-CN"/>
           </a:p>
         </p:txBody>
       </p:sp>
     </p:spTree>
-    <p:extLst>
-      <p:ext uri="{BB962C8B-B14F-4D97-AF65-F5344CB8AC3E}">
-        <p14:creationId xmlns:p14="http://schemas.microsoft.com/office/powerpoint/2010/main" val="2749499828"/>
-      </p:ext>
-    </p:extLst>
   </p:cSld>
   <p:clrMapOvr>
     <a:masterClrMapping/>
@@ -1826,6 +1635,7 @@
               <a:rPr lang="zh-CN" altLang="en-US"/>
               <a:t>单击此处编辑母版文本样式</a:t>
             </a:r>
+            <a:endParaRPr lang="zh-CN" altLang="en-US"/>
           </a:p>
           <a:p>
             <a:pPr lvl="1"/>
@@ -1833,6 +1643,7 @@
               <a:rPr lang="zh-CN" altLang="en-US"/>
               <a:t>二级</a:t>
             </a:r>
+            <a:endParaRPr lang="zh-CN" altLang="en-US"/>
           </a:p>
           <a:p>
             <a:pPr lvl="2"/>
@@ -1840,6 +1651,7 @@
               <a:rPr lang="zh-CN" altLang="en-US"/>
               <a:t>三级</a:t>
             </a:r>
+            <a:endParaRPr lang="zh-CN" altLang="en-US"/>
           </a:p>
           <a:p>
             <a:pPr lvl="3"/>
@@ -1847,6 +1659,7 @@
               <a:rPr lang="zh-CN" altLang="en-US"/>
               <a:t>四级</a:t>
             </a:r>
+            <a:endParaRPr lang="zh-CN" altLang="en-US"/>
           </a:p>
           <a:p>
             <a:pPr lvl="4"/>
@@ -1883,6 +1696,7 @@
               <a:rPr lang="zh-CN" altLang="en-US"/>
               <a:t>单击此处编辑母版文本样式</a:t>
             </a:r>
+            <a:endParaRPr lang="zh-CN" altLang="en-US"/>
           </a:p>
           <a:p>
             <a:pPr lvl="1"/>
@@ -1890,6 +1704,7 @@
               <a:rPr lang="zh-CN" altLang="en-US"/>
               <a:t>二级</a:t>
             </a:r>
+            <a:endParaRPr lang="zh-CN" altLang="en-US"/>
           </a:p>
           <a:p>
             <a:pPr lvl="2"/>
@@ -1897,6 +1712,7 @@
               <a:rPr lang="zh-CN" altLang="en-US"/>
               <a:t>三级</a:t>
             </a:r>
+            <a:endParaRPr lang="zh-CN" altLang="en-US"/>
           </a:p>
           <a:p>
             <a:pPr lvl="3"/>
@@ -1904,6 +1720,7 @@
               <a:rPr lang="zh-CN" altLang="en-US"/>
               <a:t>四级</a:t>
             </a:r>
+            <a:endParaRPr lang="zh-CN" altLang="en-US"/>
           </a:p>
           <a:p>
             <a:pPr lvl="4"/>
@@ -1970,19 +1787,12 @@
           <a:p>
             <a:fld id="{E775FBB1-4117-4C75-9EBC-8E46A5A9CA85}" type="slidenum">
               <a:rPr lang="en-US" altLang="zh-CN" smtClean="0"/>
-              <a:pPr/>
-              <a:t>‹#›</a:t>
             </a:fld>
             <a:endParaRPr lang="en-US" altLang="zh-CN"/>
           </a:p>
         </p:txBody>
       </p:sp>
     </p:spTree>
-    <p:extLst>
-      <p:ext uri="{BB962C8B-B14F-4D97-AF65-F5344CB8AC3E}">
-        <p14:creationId xmlns:p14="http://schemas.microsoft.com/office/powerpoint/2010/main" val="3124347690"/>
-      </p:ext>
-    </p:extLst>
   </p:cSld>
   <p:clrMapOvr>
     <a:masterClrMapping/>
@@ -2097,6 +1907,7 @@
               <a:rPr lang="zh-CN" altLang="en-US"/>
               <a:t>单击此处编辑母版文本样式</a:t>
             </a:r>
+            <a:endParaRPr lang="zh-CN" altLang="en-US"/>
           </a:p>
         </p:txBody>
       </p:sp>
@@ -2125,6 +1936,7 @@
               <a:rPr lang="zh-CN" altLang="en-US"/>
               <a:t>单击此处编辑母版文本样式</a:t>
             </a:r>
+            <a:endParaRPr lang="zh-CN" altLang="en-US"/>
           </a:p>
           <a:p>
             <a:pPr lvl="1"/>
@@ -2132,6 +1944,7 @@
               <a:rPr lang="zh-CN" altLang="en-US"/>
               <a:t>二级</a:t>
             </a:r>
+            <a:endParaRPr lang="zh-CN" altLang="en-US"/>
           </a:p>
           <a:p>
             <a:pPr lvl="2"/>
@@ -2139,6 +1952,7 @@
               <a:rPr lang="zh-CN" altLang="en-US"/>
               <a:t>三级</a:t>
             </a:r>
+            <a:endParaRPr lang="zh-CN" altLang="en-US"/>
           </a:p>
           <a:p>
             <a:pPr lvl="3"/>
@@ -2146,6 +1960,7 @@
               <a:rPr lang="zh-CN" altLang="en-US"/>
               <a:t>四级</a:t>
             </a:r>
+            <a:endParaRPr lang="zh-CN" altLang="en-US"/>
           </a:p>
           <a:p>
             <a:pPr lvl="4"/>
@@ -2219,6 +2034,7 @@
               <a:rPr lang="zh-CN" altLang="en-US"/>
               <a:t>单击此处编辑母版文本样式</a:t>
             </a:r>
+            <a:endParaRPr lang="zh-CN" altLang="en-US"/>
           </a:p>
         </p:txBody>
       </p:sp>
@@ -2247,6 +2063,7 @@
               <a:rPr lang="zh-CN" altLang="en-US"/>
               <a:t>单击此处编辑母版文本样式</a:t>
             </a:r>
+            <a:endParaRPr lang="zh-CN" altLang="en-US"/>
           </a:p>
           <a:p>
             <a:pPr lvl="1"/>
@@ -2254,6 +2071,7 @@
               <a:rPr lang="zh-CN" altLang="en-US"/>
               <a:t>二级</a:t>
             </a:r>
+            <a:endParaRPr lang="zh-CN" altLang="en-US"/>
           </a:p>
           <a:p>
             <a:pPr lvl="2"/>
@@ -2261,6 +2079,7 @@
               <a:rPr lang="zh-CN" altLang="en-US"/>
               <a:t>三级</a:t>
             </a:r>
+            <a:endParaRPr lang="zh-CN" altLang="en-US"/>
           </a:p>
           <a:p>
             <a:pPr lvl="3"/>
@@ -2268,6 +2087,7 @@
               <a:rPr lang="zh-CN" altLang="en-US"/>
               <a:t>四级</a:t>
             </a:r>
+            <a:endParaRPr lang="zh-CN" altLang="en-US"/>
           </a:p>
           <a:p>
             <a:pPr lvl="4"/>
@@ -2334,19 +2154,12 @@
           <a:p>
             <a:fld id="{37427281-57C8-46B7-9E15-9024953134D5}" type="slidenum">
               <a:rPr lang="en-US" altLang="zh-CN" smtClean="0"/>
-              <a:pPr/>
-              <a:t>‹#›</a:t>
             </a:fld>
             <a:endParaRPr lang="en-US" altLang="zh-CN"/>
           </a:p>
         </p:txBody>
       </p:sp>
     </p:spTree>
-    <p:extLst>
-      <p:ext uri="{BB962C8B-B14F-4D97-AF65-F5344CB8AC3E}">
-        <p14:creationId xmlns:p14="http://schemas.microsoft.com/office/powerpoint/2010/main" val="3636471017"/>
-      </p:ext>
-    </p:extLst>
   </p:cSld>
   <p:clrMapOvr>
     <a:masterClrMapping/>
@@ -2449,19 +2262,12 @@
           <a:p>
             <a:fld id="{D1631534-F019-4C28-A7E7-CA40FE872C00}" type="slidenum">
               <a:rPr lang="en-US" altLang="zh-CN" smtClean="0"/>
-              <a:pPr/>
-              <a:t>‹#›</a:t>
             </a:fld>
             <a:endParaRPr lang="en-US" altLang="zh-CN"/>
           </a:p>
         </p:txBody>
       </p:sp>
     </p:spTree>
-    <p:extLst>
-      <p:ext uri="{BB962C8B-B14F-4D97-AF65-F5344CB8AC3E}">
-        <p14:creationId xmlns:p14="http://schemas.microsoft.com/office/powerpoint/2010/main" val="3599840144"/>
-      </p:ext>
-    </p:extLst>
   </p:cSld>
   <p:clrMapOvr>
     <a:masterClrMapping/>
@@ -2541,19 +2347,12 @@
           <a:p>
             <a:fld id="{2277EE72-DD98-41E0-8A6D-41B14ACE572B}" type="slidenum">
               <a:rPr lang="en-US" altLang="zh-CN" smtClean="0"/>
-              <a:pPr/>
-              <a:t>‹#›</a:t>
             </a:fld>
             <a:endParaRPr lang="en-US" altLang="zh-CN"/>
           </a:p>
         </p:txBody>
       </p:sp>
     </p:spTree>
-    <p:extLst>
-      <p:ext uri="{BB962C8B-B14F-4D97-AF65-F5344CB8AC3E}">
-        <p14:creationId xmlns:p14="http://schemas.microsoft.com/office/powerpoint/2010/main" val="1055589935"/>
-      </p:ext>
-    </p:extLst>
   </p:cSld>
   <p:clrMapOvr>
     <a:masterClrMapping/>
@@ -2663,6 +2462,7 @@
               <a:rPr lang="zh-CN" altLang="en-US"/>
               <a:t>单击此处编辑母版文本样式</a:t>
             </a:r>
+            <a:endParaRPr lang="zh-CN" altLang="en-US"/>
           </a:p>
           <a:p>
             <a:pPr lvl="1"/>
@@ -2670,6 +2470,7 @@
               <a:rPr lang="zh-CN" altLang="en-US"/>
               <a:t>二级</a:t>
             </a:r>
+            <a:endParaRPr lang="zh-CN" altLang="en-US"/>
           </a:p>
           <a:p>
             <a:pPr lvl="2"/>
@@ -2677,6 +2478,7 @@
               <a:rPr lang="zh-CN" altLang="en-US"/>
               <a:t>三级</a:t>
             </a:r>
+            <a:endParaRPr lang="zh-CN" altLang="en-US"/>
           </a:p>
           <a:p>
             <a:pPr lvl="3"/>
@@ -2684,6 +2486,7 @@
               <a:rPr lang="zh-CN" altLang="en-US"/>
               <a:t>四级</a:t>
             </a:r>
+            <a:endParaRPr lang="zh-CN" altLang="en-US"/>
           </a:p>
           <a:p>
             <a:pPr lvl="4"/>
@@ -2757,6 +2560,7 @@
               <a:rPr lang="zh-CN" altLang="en-US"/>
               <a:t>单击此处编辑母版文本样式</a:t>
             </a:r>
+            <a:endParaRPr lang="zh-CN" altLang="en-US"/>
           </a:p>
         </p:txBody>
       </p:sp>
@@ -2815,19 +2619,12 @@
           <a:p>
             <a:fld id="{9D2BEB76-FE05-42A1-83E5-C13FB43DBCBD}" type="slidenum">
               <a:rPr lang="en-US" altLang="zh-CN" smtClean="0"/>
-              <a:pPr/>
-              <a:t>‹#›</a:t>
             </a:fld>
             <a:endParaRPr lang="en-US" altLang="zh-CN"/>
           </a:p>
         </p:txBody>
       </p:sp>
     </p:spTree>
-    <p:extLst>
-      <p:ext uri="{BB962C8B-B14F-4D97-AF65-F5344CB8AC3E}">
-        <p14:creationId xmlns:p14="http://schemas.microsoft.com/office/powerpoint/2010/main" val="29155856"/>
-      </p:ext>
-    </p:extLst>
   </p:cSld>
   <p:clrMapOvr>
     <a:masterClrMapping/>
@@ -3011,6 +2808,7 @@
               <a:rPr lang="zh-CN" altLang="en-US"/>
               <a:t>单击此处编辑母版文本样式</a:t>
             </a:r>
+            <a:endParaRPr lang="zh-CN" altLang="en-US"/>
           </a:p>
         </p:txBody>
       </p:sp>
@@ -3069,19 +2867,12 @@
           <a:p>
             <a:fld id="{708C0644-D486-4D60-9B3C-97F8B2A68371}" type="slidenum">
               <a:rPr lang="en-US" altLang="zh-CN" smtClean="0"/>
-              <a:pPr/>
-              <a:t>‹#›</a:t>
             </a:fld>
             <a:endParaRPr lang="en-US" altLang="zh-CN"/>
           </a:p>
         </p:txBody>
       </p:sp>
     </p:spTree>
-    <p:extLst>
-      <p:ext uri="{BB962C8B-B14F-4D97-AF65-F5344CB8AC3E}">
-        <p14:creationId xmlns:p14="http://schemas.microsoft.com/office/powerpoint/2010/main" val="1187138522"/>
-      </p:ext>
-    </p:extLst>
   </p:cSld>
   <p:clrMapOvr>
     <a:masterClrMapping/>
@@ -3174,6 +2965,7 @@
               <a:rPr lang="zh-CN" altLang="en-US"/>
               <a:t>编辑母版文本样式</a:t>
             </a:r>
+            <a:endParaRPr lang="zh-CN" altLang="en-US"/>
           </a:p>
           <a:p>
             <a:pPr lvl="1"/>
@@ -3181,6 +2973,7 @@
               <a:rPr lang="zh-CN" altLang="en-US"/>
               <a:t>第二级</a:t>
             </a:r>
+            <a:endParaRPr lang="zh-CN" altLang="en-US"/>
           </a:p>
           <a:p>
             <a:pPr lvl="2"/>
@@ -3188,6 +2981,7 @@
               <a:rPr lang="zh-CN" altLang="en-US"/>
               <a:t>第三级</a:t>
             </a:r>
+            <a:endParaRPr lang="zh-CN" altLang="en-US"/>
           </a:p>
           <a:p>
             <a:pPr lvl="3"/>
@@ -3195,6 +2989,7 @@
               <a:rPr lang="zh-CN" altLang="en-US"/>
               <a:t>第四级</a:t>
             </a:r>
+            <a:endParaRPr lang="zh-CN" altLang="en-US"/>
           </a:p>
           <a:p>
             <a:pPr lvl="4"/>
@@ -3315,33 +3110,26 @@
           <a:p>
             <a:fld id="{523E7B41-4038-4FD6-8B11-74990DAAD65C}" type="slidenum">
               <a:rPr lang="en-US" altLang="zh-CN" smtClean="0"/>
-              <a:pPr/>
-              <a:t>‹#›</a:t>
             </a:fld>
             <a:endParaRPr lang="en-US" altLang="zh-CN"/>
           </a:p>
         </p:txBody>
       </p:sp>
     </p:spTree>
-    <p:extLst>
-      <p:ext uri="{BB962C8B-B14F-4D97-AF65-F5344CB8AC3E}">
-        <p14:creationId xmlns:p14="http://schemas.microsoft.com/office/powerpoint/2010/main" val="4113758108"/>
-      </p:ext>
-    </p:extLst>
   </p:cSld>
   <p:clrMap bg1="lt1" tx1="dk1" bg2="lt2" tx2="dk2" accent1="accent1" accent2="accent2" accent3="accent3" accent4="accent4" accent5="accent5" accent6="accent6" hlink="hlink" folHlink="folHlink"/>
   <p:sldLayoutIdLst>
-    <p:sldLayoutId id="2147483661" r:id="rId1"/>
-    <p:sldLayoutId id="2147483662" r:id="rId2"/>
-    <p:sldLayoutId id="2147483663" r:id="rId3"/>
-    <p:sldLayoutId id="2147483664" r:id="rId4"/>
-    <p:sldLayoutId id="2147483665" r:id="rId5"/>
-    <p:sldLayoutId id="2147483666" r:id="rId6"/>
-    <p:sldLayoutId id="2147483667" r:id="rId7"/>
-    <p:sldLayoutId id="2147483668" r:id="rId8"/>
-    <p:sldLayoutId id="2147483669" r:id="rId9"/>
-    <p:sldLayoutId id="2147483670" r:id="rId10"/>
-    <p:sldLayoutId id="2147483671" r:id="rId11"/>
+    <p:sldLayoutId id="2147483649" r:id="rId1"/>
+    <p:sldLayoutId id="2147483650" r:id="rId2"/>
+    <p:sldLayoutId id="2147483651" r:id="rId3"/>
+    <p:sldLayoutId id="2147483652" r:id="rId4"/>
+    <p:sldLayoutId id="2147483653" r:id="rId5"/>
+    <p:sldLayoutId id="2147483654" r:id="rId6"/>
+    <p:sldLayoutId id="2147483655" r:id="rId7"/>
+    <p:sldLayoutId id="2147483656" r:id="rId8"/>
+    <p:sldLayoutId id="2147483657" r:id="rId9"/>
+    <p:sldLayoutId id="2147483658" r:id="rId10"/>
+    <p:sldLayoutId id="2147483659" r:id="rId11"/>
   </p:sldLayoutIdLst>
   <p:txStyles>
     <p:titleStyle>
@@ -3632,7 +3420,7 @@
     <p:bg>
       <p:bgPr>
         <a:blipFill dpi="0" rotWithShape="1">
-          <a:blip r:embed="rId2">
+          <a:blip r:embed="rId1">
             <a:lum/>
           </a:blip>
           <a:srcRect/>
@@ -3659,13 +3447,7 @@
       </p:grpSpPr>
       <p:sp>
         <p:nvSpPr>
-          <p:cNvPr id="6155" name="Rectangle 11">
-            <a:extLst>
-              <a:ext uri="{FF2B5EF4-FFF2-40B4-BE49-F238E27FC236}">
-                <a16:creationId xmlns:a16="http://schemas.microsoft.com/office/drawing/2014/main" id="{36B8EEF3-B27B-4D67-A889-CF3A543DECF5}"/>
-              </a:ext>
-            </a:extLst>
-          </p:cNvPr>
+          <p:cNvPr id="6155" name="Rectangle 11"/>
           <p:cNvSpPr>
             <a:spLocks noGrp="1" noChangeArrowheads="1"/>
           </p:cNvSpPr>
@@ -3687,7 +3469,7 @@
           <a:p>
             <a:r>
               <a:rPr lang="zh-CN" altLang="en-US" sz="4800" b="1" dirty="0"/>
-              <a:t>布里渊散射光谱的测量</a:t>
+              <a:t>使用标准具测量布里渊光谱</a:t>
             </a:r>
             <a:endParaRPr lang="zh-CN" altLang="zh-CN" sz="3600" dirty="0">
               <a:solidFill>
@@ -3701,13 +3483,7 @@
       </p:sp>
       <p:sp>
         <p:nvSpPr>
-          <p:cNvPr id="6156" name="Rectangle 12">
-            <a:extLst>
-              <a:ext uri="{FF2B5EF4-FFF2-40B4-BE49-F238E27FC236}">
-                <a16:creationId xmlns:a16="http://schemas.microsoft.com/office/drawing/2014/main" id="{718CB3BE-0FC3-47CB-86D0-A75E9FCF8738}"/>
-              </a:ext>
-            </a:extLst>
-          </p:cNvPr>
+          <p:cNvPr id="6156" name="Rectangle 12"/>
           <p:cNvSpPr>
             <a:spLocks noGrp="1" noChangeArrowheads="1"/>
           </p:cNvSpPr>
@@ -3730,8 +3506,12 @@
                 <a:latin typeface="华文中宋" panose="02010600040101010101" pitchFamily="2" charset="-122"/>
                 <a:ea typeface="华文中宋" panose="02010600040101010101" pitchFamily="2" charset="-122"/>
               </a:rPr>
-              <a:t>9.20</a:t>
-            </a:r>
+              <a:t>9.24</a:t>
+            </a:r>
+            <a:endParaRPr lang="en-US" altLang="zh-CN" sz="3200" dirty="0">
+              <a:latin typeface="华文中宋" panose="02010600040101010101" pitchFamily="2" charset="-122"/>
+              <a:ea typeface="华文中宋" panose="02010600040101010101" pitchFamily="2" charset="-122"/>
+            </a:endParaRPr>
           </a:p>
         </p:txBody>
       </p:sp>
@@ -3749,7 +3529,7 @@
     <p:bg>
       <p:bgPr>
         <a:blipFill dpi="0" rotWithShape="1">
-          <a:blip r:embed="rId3">
+          <a:blip r:embed="rId1">
             <a:lum/>
           </a:blip>
           <a:srcRect/>
@@ -3762,13 +3542,7 @@
     </p:bg>
     <p:spTree>
       <p:nvGrpSpPr>
-        <p:cNvPr id="1" name="">
-          <a:extLst>
-            <a:ext uri="{FF2B5EF4-FFF2-40B4-BE49-F238E27FC236}">
-              <a16:creationId xmlns:a16="http://schemas.microsoft.com/office/drawing/2014/main" id="{CADA493D-D38F-89E7-8692-06B13AAA55E7}"/>
-            </a:ext>
-          </a:extLst>
-        </p:cNvPr>
+        <p:cNvPr id="1" name=""/>
         <p:cNvGrpSpPr/>
         <p:nvPr/>
       </p:nvGrpSpPr>
@@ -3782,13 +3556,7 @@
       </p:grpSpPr>
       <p:sp>
         <p:nvSpPr>
-          <p:cNvPr id="7179" name="Rectangle 11">
-            <a:extLst>
-              <a:ext uri="{FF2B5EF4-FFF2-40B4-BE49-F238E27FC236}">
-                <a16:creationId xmlns:a16="http://schemas.microsoft.com/office/drawing/2014/main" id="{2AA24768-206C-8B9A-8B9F-03E4D1B94EE0}"/>
-              </a:ext>
-            </a:extLst>
-          </p:cNvPr>
+          <p:cNvPr id="7179" name="Rectangle 11"/>
           <p:cNvSpPr>
             <a:spLocks noGrp="1" noChangeArrowheads="1"/>
           </p:cNvSpPr>
@@ -3808,16 +3576,6 @@
           </a:bodyPr>
           <a:lstStyle/>
           <a:p>
-            <a:r>
-              <a:rPr lang="en-US" altLang="zh-CN" sz="4000" dirty="0">
-                <a:solidFill>
-                  <a:schemeClr val="bg1"/>
-                </a:solidFill>
-                <a:latin typeface="华文中宋" panose="02010600040101010101" pitchFamily="2" charset="-122"/>
-                <a:ea typeface="华文中宋" panose="02010600040101010101" pitchFamily="2" charset="-122"/>
-              </a:rPr>
-              <a:t>FP</a:t>
-            </a:r>
             <a:r>
               <a:rPr lang="zh-CN" altLang="en-US" sz="4000" dirty="0">
                 <a:solidFill>
@@ -3826,7 +3584,7 @@
                 <a:latin typeface="华文中宋" panose="02010600040101010101" pitchFamily="2" charset="-122"/>
                 <a:ea typeface="华文中宋" panose="02010600040101010101" pitchFamily="2" charset="-122"/>
               </a:rPr>
-              <a:t>干涉仪</a:t>
+              <a:t>标准具</a:t>
             </a:r>
             <a:endParaRPr lang="zh-CN" altLang="zh-CN" sz="4000" dirty="0">
               <a:solidFill>
@@ -3838,17 +3596,11 @@
           </a:p>
         </p:txBody>
       </p:sp>
-      <mc:AlternateContent xmlns:mc="http://schemas.openxmlformats.org/markup-compatibility/2006" xmlns:a14="http://schemas.microsoft.com/office/drawing/2010/main">
-        <mc:Choice Requires="a14">
+      <mc:AlternateContent xmlns:mc="http://schemas.openxmlformats.org/markup-compatibility/2006">
+        <mc:Choice xmlns:a14="http://schemas.microsoft.com/office/drawing/2010/main" Requires="a14">
           <p:sp>
             <p:nvSpPr>
-              <p:cNvPr id="12" name="内容占位符 11">
-                <a:extLst>
-                  <a:ext uri="{FF2B5EF4-FFF2-40B4-BE49-F238E27FC236}">
-                    <a16:creationId xmlns:a16="http://schemas.microsoft.com/office/drawing/2014/main" id="{53B75E95-4F0E-816F-4989-476932E11FF9}"/>
-                  </a:ext>
-                </a:extLst>
-              </p:cNvPr>
+              <p:cNvPr id="12" name="内容占位符 11"/>
               <p:cNvSpPr>
                 <a:spLocks noGrp="1"/>
               </p:cNvSpPr>
@@ -3858,13 +3610,13 @@
             </p:nvSpPr>
             <p:spPr>
               <a:xfrm>
-                <a:off x="101245" y="1412776"/>
-                <a:ext cx="9595155" cy="4351338"/>
+                <a:off x="258927" y="1376825"/>
+                <a:ext cx="7277233" cy="5098617"/>
               </a:xfrm>
             </p:spPr>
             <p:txBody>
               <a:bodyPr>
-                <a:normAutofit fontScale="85000" lnSpcReduction="10000"/>
+                <a:normAutofit/>
               </a:bodyPr>
               <a:lstStyle/>
               <a:p>
@@ -3875,250 +3627,14 @@
                   <a:buNone/>
                 </a:pPr>
                 <a:r>
-                  <a:rPr lang="en-US" altLang="zh-CN" sz="2200" dirty="0"/>
-                  <a:t>Thorlabs</a:t>
+                  <a:rPr lang="en-US" altLang="zh-CN" sz="2000" dirty="0"/>
+                  <a:t>2016</a:t>
                 </a:r>
                 <a:r>
-                  <a:rPr lang="zh-CN" altLang="en-US" sz="2200" dirty="0"/>
-                  <a:t>的</a:t>
+                  <a:rPr lang="zh-CN" altLang="en-US" sz="2000" dirty="0"/>
+                  <a:t>年华中科大使用标准具对水的布里渊散射谱进行了测量。</a:t>
                 </a:r>
-                <a:r>
-                  <a:rPr lang="en-US" altLang="zh-CN" sz="2200" dirty="0"/>
-                  <a:t>FP</a:t>
-                </a:r>
-                <a:r>
-                  <a:rPr lang="zh-CN" altLang="en-US" sz="2200" dirty="0"/>
-                  <a:t>干涉仪，其自由光谱范围</a:t>
-                </a:r>
-                <a14:m>
-                  <m:oMath xmlns:m="http://schemas.openxmlformats.org/officeDocument/2006/math">
-                    <m:sSub>
-                      <m:sSubPr>
-                        <m:ctrlPr>
-                          <a:rPr lang="en-US" altLang="zh-CN" sz="2200" b="0" i="1" smtClean="0">
-                            <a:latin typeface="Cambria Math" panose="02040503050406030204" pitchFamily="18" charset="0"/>
-                          </a:rPr>
-                        </m:ctrlPr>
-                      </m:sSubPr>
-                      <m:e>
-                        <m:r>
-                          <a:rPr lang="en-US" altLang="zh-CN" sz="2200" b="0" i="1" smtClean="0">
-                            <a:latin typeface="Cambria Math" panose="02040503050406030204" pitchFamily="18" charset="0"/>
-                          </a:rPr>
-                          <m:t>𝜈</m:t>
-                        </m:r>
-                      </m:e>
-                      <m:sub>
-                        <m:r>
-                          <a:rPr lang="en-US" altLang="zh-CN" sz="2200" b="0" i="1" smtClean="0">
-                            <a:latin typeface="Cambria Math" panose="02040503050406030204" pitchFamily="18" charset="0"/>
-                          </a:rPr>
-                          <m:t>𝐹𝑆𝑅</m:t>
-                        </m:r>
-                      </m:sub>
-                    </m:sSub>
-                    <m:r>
-                      <a:rPr lang="en-US" altLang="zh-CN" sz="2200" b="0" i="1" smtClean="0">
-                        <a:latin typeface="Cambria Math" panose="02040503050406030204" pitchFamily="18" charset="0"/>
-                      </a:rPr>
-                      <m:t>=</m:t>
-                    </m:r>
-                    <m:sSub>
-                      <m:sSubPr>
-                        <m:ctrlPr>
-                          <a:rPr lang="en-US" altLang="zh-CN" sz="2200" b="0" i="1" smtClean="0">
-                            <a:latin typeface="Cambria Math" panose="02040503050406030204" pitchFamily="18" charset="0"/>
-                          </a:rPr>
-                        </m:ctrlPr>
-                      </m:sSubPr>
-                      <m:e>
-                        <m:r>
-                          <a:rPr lang="en-US" altLang="zh-CN" sz="2200" b="0" i="1" smtClean="0">
-                            <a:latin typeface="Cambria Math" panose="02040503050406030204" pitchFamily="18" charset="0"/>
-                          </a:rPr>
-                          <m:t>𝜈</m:t>
-                        </m:r>
-                      </m:e>
-                      <m:sub>
-                        <m:r>
-                          <a:rPr lang="en-US" altLang="zh-CN" sz="2200" b="0" i="1" smtClean="0">
-                            <a:latin typeface="Cambria Math" panose="02040503050406030204" pitchFamily="18" charset="0"/>
-                          </a:rPr>
-                          <m:t>𝑞</m:t>
-                        </m:r>
-                        <m:r>
-                          <a:rPr lang="en-US" altLang="zh-CN" sz="2200" b="0" i="1" smtClean="0">
-                            <a:latin typeface="Cambria Math" panose="02040503050406030204" pitchFamily="18" charset="0"/>
-                          </a:rPr>
-                          <m:t> 00</m:t>
-                        </m:r>
-                      </m:sub>
-                    </m:sSub>
-                    <m:r>
-                      <a:rPr lang="en-US" altLang="zh-CN" sz="2200" b="0" i="1" smtClean="0">
-                        <a:latin typeface="Cambria Math" panose="02040503050406030204" pitchFamily="18" charset="0"/>
-                      </a:rPr>
-                      <m:t>−</m:t>
-                    </m:r>
-                    <m:sSub>
-                      <m:sSubPr>
-                        <m:ctrlPr>
-                          <a:rPr lang="en-US" altLang="zh-CN" sz="2200" b="0" i="1" smtClean="0">
-                            <a:latin typeface="Cambria Math" panose="02040503050406030204" pitchFamily="18" charset="0"/>
-                          </a:rPr>
-                        </m:ctrlPr>
-                      </m:sSubPr>
-                      <m:e>
-                        <m:r>
-                          <a:rPr lang="en-US" altLang="zh-CN" sz="2200" b="0" i="1" smtClean="0">
-                            <a:latin typeface="Cambria Math" panose="02040503050406030204" pitchFamily="18" charset="0"/>
-                          </a:rPr>
-                          <m:t>𝜈</m:t>
-                        </m:r>
-                      </m:e>
-                      <m:sub>
-                        <m:r>
-                          <a:rPr lang="en-US" altLang="zh-CN" sz="2200" b="0" i="1" smtClean="0">
-                            <a:latin typeface="Cambria Math" panose="02040503050406030204" pitchFamily="18" charset="0"/>
-                          </a:rPr>
-                          <m:t>𝑞</m:t>
-                        </m:r>
-                        <m:r>
-                          <a:rPr lang="en-US" altLang="zh-CN" sz="2200" b="0" i="1" smtClean="0">
-                            <a:latin typeface="Cambria Math" panose="02040503050406030204" pitchFamily="18" charset="0"/>
-                          </a:rPr>
-                          <m:t>+1 00</m:t>
-                        </m:r>
-                      </m:sub>
-                    </m:sSub>
-                    <m:r>
-                      <a:rPr lang="en-US" altLang="zh-CN" sz="2200" b="0" i="1" smtClean="0">
-                        <a:latin typeface="Cambria Math" panose="02040503050406030204" pitchFamily="18" charset="0"/>
-                      </a:rPr>
-                      <m:t>=</m:t>
-                    </m:r>
-                    <m:f>
-                      <m:fPr>
-                        <m:ctrlPr>
-                          <a:rPr lang="en-US" altLang="zh-CN" sz="2200" b="0" i="1" smtClean="0">
-                            <a:latin typeface="Cambria Math" panose="02040503050406030204" pitchFamily="18" charset="0"/>
-                          </a:rPr>
-                        </m:ctrlPr>
-                      </m:fPr>
-                      <m:num>
-                        <m:r>
-                          <a:rPr lang="en-US" altLang="zh-CN" sz="2200" b="0" i="1" smtClean="0">
-                            <a:latin typeface="Cambria Math" panose="02040503050406030204" pitchFamily="18" charset="0"/>
-                          </a:rPr>
-                          <m:t>𝑐</m:t>
-                        </m:r>
-                      </m:num>
-                      <m:den>
-                        <m:r>
-                          <a:rPr lang="en-US" altLang="zh-CN" sz="2200" b="0" i="1" smtClean="0">
-                            <a:latin typeface="Cambria Math" panose="02040503050406030204" pitchFamily="18" charset="0"/>
-                          </a:rPr>
-                          <m:t>2</m:t>
-                        </m:r>
-                        <m:r>
-                          <a:rPr lang="en-US" altLang="zh-CN" sz="2200" b="0" i="1" smtClean="0">
-                            <a:latin typeface="Cambria Math" panose="02040503050406030204" pitchFamily="18" charset="0"/>
-                          </a:rPr>
-                          <m:t>𝐿</m:t>
-                        </m:r>
-                      </m:den>
-                    </m:f>
-                    <m:r>
-                      <a:rPr lang="zh-CN" altLang="en-US" sz="2200" i="1">
-                        <a:latin typeface="Cambria Math" panose="02040503050406030204" pitchFamily="18" charset="0"/>
-                      </a:rPr>
-                      <m:t>，</m:t>
-                    </m:r>
-                  </m:oMath>
-                </a14:m>
-                <a:r>
-                  <a:rPr lang="zh-CN" altLang="en-US" sz="2200" dirty="0"/>
-                  <a:t>精细度</a:t>
-                </a:r>
-                <a14:m>
-                  <m:oMath xmlns:m="http://schemas.openxmlformats.org/officeDocument/2006/math">
-                    <m:r>
-                      <a:rPr lang="en-US" altLang="zh-CN" sz="2200" b="0" i="1" smtClean="0">
-                        <a:latin typeface="Cambria Math" panose="02040503050406030204" pitchFamily="18" charset="0"/>
-                      </a:rPr>
-                      <m:t>𝐹</m:t>
-                    </m:r>
-                    <m:r>
-                      <a:rPr lang="en-US" altLang="zh-CN" sz="2200" b="0" i="1" smtClean="0">
-                        <a:latin typeface="Cambria Math" panose="02040503050406030204" pitchFamily="18" charset="0"/>
-                      </a:rPr>
-                      <m:t>=</m:t>
-                    </m:r>
-                    <m:f>
-                      <m:fPr>
-                        <m:ctrlPr>
-                          <a:rPr lang="en-US" altLang="zh-CN" sz="2200" b="0" i="1" smtClean="0">
-                            <a:latin typeface="Cambria Math" panose="02040503050406030204" pitchFamily="18" charset="0"/>
-                          </a:rPr>
-                        </m:ctrlPr>
-                      </m:fPr>
-                      <m:num>
-                        <m:r>
-                          <a:rPr lang="en-US" altLang="zh-CN" sz="2200" b="0" i="1" smtClean="0">
-                            <a:latin typeface="Cambria Math" panose="02040503050406030204" pitchFamily="18" charset="0"/>
-                          </a:rPr>
-                          <m:t>𝜋</m:t>
-                        </m:r>
-                        <m:rad>
-                          <m:radPr>
-                            <m:degHide m:val="on"/>
-                            <m:ctrlPr>
-                              <a:rPr lang="en-US" altLang="zh-CN" sz="2200" b="0" i="1" smtClean="0">
-                                <a:latin typeface="Cambria Math" panose="02040503050406030204" pitchFamily="18" charset="0"/>
-                              </a:rPr>
-                            </m:ctrlPr>
-                          </m:radPr>
-                          <m:deg/>
-                          <m:e>
-                            <m:r>
-                              <a:rPr lang="en-US" altLang="zh-CN" sz="2200" b="0" i="1" smtClean="0">
-                                <a:latin typeface="Cambria Math" panose="02040503050406030204" pitchFamily="18" charset="0"/>
-                              </a:rPr>
-                              <m:t>𝑟</m:t>
-                            </m:r>
-                          </m:e>
-                        </m:rad>
-                      </m:num>
-                      <m:den>
-                        <m:r>
-                          <a:rPr lang="en-US" altLang="zh-CN" sz="2200" b="0" i="1" smtClean="0">
-                            <a:latin typeface="Cambria Math" panose="02040503050406030204" pitchFamily="18" charset="0"/>
-                          </a:rPr>
-                          <m:t>2(1−</m:t>
-                        </m:r>
-                        <m:r>
-                          <a:rPr lang="en-US" altLang="zh-CN" sz="2200" b="0" i="1" smtClean="0">
-                            <a:latin typeface="Cambria Math" panose="02040503050406030204" pitchFamily="18" charset="0"/>
-                          </a:rPr>
-                          <m:t>𝑟</m:t>
-                        </m:r>
-                        <m:r>
-                          <a:rPr lang="en-US" altLang="zh-CN" sz="2200" b="0" i="1" smtClean="0">
-                            <a:latin typeface="Cambria Math" panose="02040503050406030204" pitchFamily="18" charset="0"/>
-                          </a:rPr>
-                          <m:t>)</m:t>
-                        </m:r>
-                      </m:den>
-                    </m:f>
-                    <m:r>
-                      <a:rPr lang="zh-CN" altLang="en-US" sz="2200" i="1">
-                        <a:latin typeface="Cambria Math" panose="02040503050406030204" pitchFamily="18" charset="0"/>
-                      </a:rPr>
-                      <m:t>。</m:t>
-                    </m:r>
-                  </m:oMath>
-                </a14:m>
-                <a:endParaRPr lang="en-US" altLang="zh-CN" sz="2200" dirty="0"/>
+                <a:endParaRPr lang="en-US" altLang="zh-CN" sz="2000" dirty="0"/>
               </a:p>
               <a:p>
                 <a:pPr marL="0" indent="0">
@@ -4128,184 +3644,509 @@
                   <a:buNone/>
                 </a:pPr>
                 <a:r>
-                  <a:rPr lang="zh-CN" altLang="en-US" sz="2200" dirty="0"/>
-                  <a:t>利用压电传感器调节腔的长度，调谐透过频率。透射光强度通过光电二极管测量，经</a:t>
-                </a:r>
-                <a:r>
-                  <a:rPr lang="en-US" altLang="zh-CN" sz="2200" dirty="0"/>
-                  <a:t>SA201B</a:t>
-                </a:r>
-                <a:r>
-                  <a:rPr lang="zh-CN" altLang="en-US" sz="2200" dirty="0"/>
-                  <a:t>控制器放大，由示波器显示或数据采集卡记录。</a:t>
-                </a:r>
-                <a:endParaRPr lang="en-US" altLang="zh-CN" sz="2200" dirty="0"/>
-              </a:p>
-              <a:p>
-                <a:pPr marL="0" indent="0">
-                  <a:lnSpc>
-                    <a:spcPct val="100000"/>
-                  </a:lnSpc>
-                  <a:buNone/>
-                </a:pPr>
-                <a:r>
-                  <a:rPr lang="zh-CN" altLang="en-US" sz="2200" dirty="0"/>
+                  <a:rPr lang="zh-CN" altLang="en-US" sz="2000" dirty="0"/>
                   <a:t>使用</a:t>
                 </a:r>
                 <a:r>
-                  <a:rPr lang="en-US" altLang="zh-CN" sz="2200" dirty="0" err="1"/>
-                  <a:t>fpi</a:t>
+                  <a:rPr lang="en-US" altLang="zh-CN" sz="2000" dirty="0"/>
+                  <a:t>650 mJ,10 Hz</a:t>
                 </a:r>
                 <a:r>
-                  <a:rPr lang="zh-CN" altLang="en-US" sz="2200" dirty="0"/>
-                  <a:t>自带的光电二极管探测极限为</a:t>
+                  <a:rPr lang="zh-CN" altLang="en-US" sz="2000" dirty="0"/>
+                  <a:t>的</a:t>
                 </a:r>
                 <a:r>
-                  <a:rPr lang="en-US" altLang="zh-CN" sz="2200" dirty="0"/>
-                  <a:t>50</a:t>
-                </a:r>
-                <a14:m>
-                  <m:oMath xmlns:m="http://schemas.openxmlformats.org/officeDocument/2006/math">
-                    <m:r>
-                      <a:rPr lang="en-US" altLang="zh-CN" sz="2200" i="1">
-                        <a:latin typeface="Cambria Math" panose="02040503050406030204" pitchFamily="18" charset="0"/>
-                      </a:rPr>
-                      <m:t>𝜇</m:t>
-                    </m:r>
-                  </m:oMath>
-                </a14:m>
-                <a:r>
-                  <a:rPr lang="en-US" altLang="zh-CN" sz="2200" dirty="0"/>
-                  <a:t>W</a:t>
+                  <a:rPr lang="en-US" altLang="zh-CN" sz="2000" dirty="0"/>
+                  <a:t>532nm</a:t>
                 </a:r>
                 <a:r>
-                  <a:rPr lang="zh-CN" altLang="en-US" sz="2200" dirty="0"/>
-                  <a:t>。取激光功率</a:t>
+                  <a:rPr lang="zh-CN" altLang="en-US" sz="2000" dirty="0"/>
+                  <a:t>激光。</a:t>
                 </a:r>
                 <a:r>
-                  <a:rPr lang="en-US" altLang="zh-CN" sz="2200" dirty="0"/>
-                  <a:t>1mW</a:t>
+                  <a:rPr lang="en-US" altLang="zh-CN" sz="2000" dirty="0"/>
+                  <a:t>F-P</a:t>
                 </a:r>
                 <a:r>
-                  <a:rPr lang="zh-CN" altLang="en-US" sz="2200" dirty="0"/>
-                  <a:t>，收集散射光比例</a:t>
-                </a:r>
-                <a14:m>
-                  <m:oMath xmlns:m="http://schemas.openxmlformats.org/officeDocument/2006/math">
-                    <m:sSup>
-                      <m:sSupPr>
-                        <m:ctrlPr>
-                          <a:rPr lang="en-US" altLang="zh-CN" sz="2200" b="0" i="1" smtClean="0">
-                            <a:latin typeface="Cambria Math" panose="02040503050406030204" pitchFamily="18" charset="0"/>
-                          </a:rPr>
-                        </m:ctrlPr>
-                      </m:sSupPr>
-                      <m:e>
-                        <m:r>
-                          <a:rPr lang="en-US" altLang="zh-CN" sz="2200" b="0" i="1" smtClean="0">
-                            <a:latin typeface="Cambria Math" panose="02040503050406030204" pitchFamily="18" charset="0"/>
-                          </a:rPr>
-                          <m:t>10</m:t>
-                        </m:r>
-                      </m:e>
-                      <m:sup>
-                        <m:r>
-                          <a:rPr lang="en-US" altLang="zh-CN" sz="2200" b="0" i="1" smtClean="0">
-                            <a:latin typeface="Cambria Math" panose="02040503050406030204" pitchFamily="18" charset="0"/>
-                          </a:rPr>
-                          <m:t>−8</m:t>
-                        </m:r>
-                      </m:sup>
-                    </m:sSup>
-                  </m:oMath>
-                </a14:m>
-                <a:r>
-                  <a:rPr lang="zh-CN" altLang="en-US" sz="2200" dirty="0"/>
-                  <a:t>，</a:t>
+                  <a:rPr lang="zh-CN" altLang="en-US" sz="2000" dirty="0"/>
+                  <a:t>标准具为石英制成的</a:t>
                 </a:r>
                 <a:r>
-                  <a:rPr lang="en-US" altLang="zh-CN" sz="2200" dirty="0"/>
-                  <a:t>FPI</a:t>
+                  <a:rPr lang="en-US" altLang="zh-CN" sz="2000" dirty="0"/>
+                  <a:t>CVI</a:t>
                 </a:r>
                 <a:r>
-                  <a:rPr lang="zh-CN" altLang="en-US" sz="2200" dirty="0"/>
-                  <a:t>透过率</a:t>
+                  <a:rPr lang="zh-CN" altLang="en-US" sz="2000" dirty="0"/>
+                  <a:t>固体标准具，自由光谱范围为</a:t>
                 </a:r>
                 <a:r>
-                  <a:rPr lang="en-US" altLang="zh-CN" sz="2200" dirty="0"/>
-                  <a:t>10</a:t>
+                  <a:rPr lang="en-US" altLang="zh-CN" sz="2000" dirty="0"/>
+                  <a:t>FSR = 20 GHz</a:t>
                 </a:r>
                 <a:r>
-                  <a:rPr lang="zh-CN" altLang="en-US" sz="2200" dirty="0"/>
-                  <a:t>％，认为待测信号在</a:t>
+                  <a:rPr lang="zh-CN" altLang="en-US" sz="2000" dirty="0"/>
+                  <a:t>，反射率</a:t>
                 </a:r>
                 <a:r>
-                  <a:rPr lang="en-US" altLang="zh-CN" sz="2200" dirty="0"/>
-                  <a:t>1pW</a:t>
+                  <a:rPr lang="en-US" altLang="zh-CN" sz="2000" dirty="0"/>
+                  <a:t>99.5%</a:t>
                 </a:r>
                 <a:r>
-                  <a:rPr lang="zh-CN" altLang="en-US" sz="2200" dirty="0"/>
-                  <a:t>量级。</a:t>
-                </a:r>
-                <a:endParaRPr lang="en-US" altLang="zh-CN" sz="2200" dirty="0"/>
-              </a:p>
-              <a:p>
-                <a:pPr marL="0" indent="0">
-                  <a:lnSpc>
-                    <a:spcPct val="100000"/>
-                  </a:lnSpc>
-                  <a:buNone/>
-                </a:pPr>
-                <a:r>
-                  <a:rPr lang="zh-CN" altLang="en-US" sz="2200" dirty="0"/>
-                  <a:t>代购需约</a:t>
-                </a:r>
-                <a:r>
-                  <a:rPr lang="en-US" altLang="zh-CN" sz="2200" dirty="0"/>
-                  <a:t>4w6</a:t>
-                </a:r>
-                <a:r>
-                  <a:rPr lang="zh-CN" altLang="en-US" sz="2200" dirty="0"/>
+                  <a:rPr lang="zh-CN" altLang="en-US" sz="2000" dirty="0"/>
                   <a:t>。</a:t>
                 </a:r>
-                <a:endParaRPr lang="en-US" altLang="zh-CN" sz="2200" dirty="0"/>
-              </a:p>
-              <a:p>
-                <a:pPr marL="0" indent="0">
-                  <a:lnSpc>
-                    <a:spcPct val="100000"/>
-                  </a:lnSpc>
-                  <a:buNone/>
-                </a:pPr>
                 <a:endParaRPr lang="en-US" altLang="zh-CN" sz="2000" dirty="0"/>
               </a:p>
               <a:p>
                 <a:pPr marL="0" indent="0">
                   <a:buNone/>
                 </a:pPr>
+                <a:r>
+                  <a:rPr lang="zh-CN" altLang="en-US" sz="2000" dirty="0"/>
+                  <a:t>文章从二维图样提取一维半径谱</a:t>
+                </a:r>
+                <a14:m>
+                  <m:oMath xmlns:m="http://schemas.openxmlformats.org/officeDocument/2006/math">
+                    <m:sSub>
+                      <m:sSubPr>
+                        <m:ctrlPr>
+                          <a:rPr lang="en-US" altLang="zh-CN" sz="2000" b="0" i="1" smtClean="0">
+                            <a:latin typeface="Cambria Math" panose="02040503050406030204" pitchFamily="18" charset="0"/>
+                          </a:rPr>
+                        </m:ctrlPr>
+                      </m:sSubPr>
+                      <m:e>
+                        <m:r>
+                          <a:rPr lang="en-US" altLang="zh-CN" sz="2000" b="0" i="1" smtClean="0">
+                            <a:latin typeface="Cambria Math" panose="02040503050406030204" pitchFamily="18" charset="0"/>
+                          </a:rPr>
+                          <m:t>𝐼</m:t>
+                        </m:r>
+                      </m:e>
+                      <m:sub>
+                        <m:r>
+                          <a:rPr lang="en-US" altLang="zh-CN" sz="2000" b="0" i="1" smtClean="0">
+                            <a:latin typeface="Cambria Math" panose="02040503050406030204" pitchFamily="18" charset="0"/>
+                          </a:rPr>
+                          <m:t>𝑟𝑒𝑐</m:t>
+                        </m:r>
+                      </m:sub>
+                    </m:sSub>
+                    <m:d>
+                      <m:dPr>
+                        <m:ctrlPr>
+                          <a:rPr lang="en-US" altLang="zh-CN" sz="2000" b="0" i="1" smtClean="0">
+                            <a:latin typeface="Cambria Math" panose="02040503050406030204" pitchFamily="18" charset="0"/>
+                          </a:rPr>
+                        </m:ctrlPr>
+                      </m:dPr>
+                      <m:e>
+                        <m:r>
+                          <a:rPr lang="en-US" altLang="zh-CN" sz="2000" b="0" i="1" smtClean="0">
+                            <a:latin typeface="Cambria Math" panose="02040503050406030204" pitchFamily="18" charset="0"/>
+                          </a:rPr>
+                          <m:t>𝑟</m:t>
+                        </m:r>
+                      </m:e>
+                    </m:d>
+                    <m:r>
+                      <a:rPr lang="zh-CN" altLang="en-US" sz="2000" i="1">
+                        <a:latin typeface="Cambria Math" panose="02040503050406030204" pitchFamily="18" charset="0"/>
+                      </a:rPr>
+                      <m:t>后</m:t>
+                    </m:r>
+                  </m:oMath>
+                </a14:m>
+                <a:r>
+                  <a:rPr lang="zh-CN" altLang="en-US" sz="2000" dirty="0"/>
+                  <a:t>，根据原卷积公式拟合得到布里渊频移与展宽；以及由</a:t>
+                </a:r>
+                <a14:m>
+                  <m:oMath xmlns:m="http://schemas.openxmlformats.org/officeDocument/2006/math">
+                    <m:r>
+                      <a:rPr lang="en-US" altLang="zh-CN" sz="2000" b="0" i="1" smtClean="0">
+                        <a:latin typeface="Cambria Math" panose="02040503050406030204" pitchFamily="18" charset="0"/>
+                      </a:rPr>
+                      <m:t>𝜈</m:t>
+                    </m:r>
+                    <m:r>
+                      <a:rPr lang="en-US" altLang="zh-CN" sz="2000" b="0" i="1" smtClean="0">
+                        <a:latin typeface="Cambria Math" panose="02040503050406030204" pitchFamily="18" charset="0"/>
+                      </a:rPr>
+                      <m:t>=</m:t>
+                    </m:r>
+                    <m:f>
+                      <m:fPr>
+                        <m:ctrlPr>
+                          <a:rPr lang="en-US" altLang="zh-CN" sz="2000" b="0" i="1" smtClean="0">
+                            <a:latin typeface="Cambria Math" panose="02040503050406030204" pitchFamily="18" charset="0"/>
+                          </a:rPr>
+                        </m:ctrlPr>
+                      </m:fPr>
+                      <m:num>
+                        <m:sSup>
+                          <m:sSupPr>
+                            <m:ctrlPr>
+                              <a:rPr lang="en-US" altLang="zh-CN" sz="2000" b="0" i="1" smtClean="0">
+                                <a:latin typeface="Cambria Math" panose="02040503050406030204" pitchFamily="18" charset="0"/>
+                              </a:rPr>
+                            </m:ctrlPr>
+                          </m:sSupPr>
+                          <m:e>
+                            <m:r>
+                              <a:rPr lang="en-US" altLang="zh-CN" sz="2000" b="0" i="1" smtClean="0">
+                                <a:latin typeface="Cambria Math" panose="02040503050406030204" pitchFamily="18" charset="0"/>
+                              </a:rPr>
+                              <m:t>𝑟</m:t>
+                            </m:r>
+                          </m:e>
+                          <m:sup>
+                            <m:r>
+                              <a:rPr lang="en-US" altLang="zh-CN" sz="2000" b="0" i="1" smtClean="0">
+                                <a:latin typeface="Cambria Math" panose="02040503050406030204" pitchFamily="18" charset="0"/>
+                              </a:rPr>
+                              <m:t>2</m:t>
+                            </m:r>
+                          </m:sup>
+                        </m:sSup>
+                        <m:r>
+                          <a:rPr lang="en-US" altLang="zh-CN" sz="2000" b="0" i="1" smtClean="0">
+                            <a:latin typeface="Cambria Math" panose="02040503050406030204" pitchFamily="18" charset="0"/>
+                          </a:rPr>
+                          <m:t>−</m:t>
+                        </m:r>
+                        <m:sSubSup>
+                          <m:sSubSupPr>
+                            <m:ctrlPr>
+                              <a:rPr lang="en-US" altLang="zh-CN" sz="2000" b="0" i="1" smtClean="0">
+                                <a:latin typeface="Cambria Math" panose="02040503050406030204" pitchFamily="18" charset="0"/>
+                              </a:rPr>
+                            </m:ctrlPr>
+                          </m:sSubSupPr>
+                          <m:e>
+                            <m:r>
+                              <a:rPr lang="en-US" altLang="zh-CN" sz="2000" b="0" i="1" smtClean="0">
+                                <a:latin typeface="Cambria Math" panose="02040503050406030204" pitchFamily="18" charset="0"/>
+                              </a:rPr>
+                              <m:t>𝑟</m:t>
+                            </m:r>
+                          </m:e>
+                          <m:sub>
+                            <m:r>
+                              <a:rPr lang="en-US" altLang="zh-CN" sz="2000" b="0" i="1" smtClean="0">
+                                <a:latin typeface="Cambria Math" panose="02040503050406030204" pitchFamily="18" charset="0"/>
+                              </a:rPr>
+                              <m:t>𝑗</m:t>
+                            </m:r>
+                            <m:r>
+                              <a:rPr lang="en-US" altLang="zh-CN" sz="2000" b="0" i="1" smtClean="0">
+                                <a:latin typeface="Cambria Math" panose="02040503050406030204" pitchFamily="18" charset="0"/>
+                              </a:rPr>
+                              <m:t>−</m:t>
+                            </m:r>
+                            <m:r>
+                              <a:rPr lang="en-US" altLang="zh-CN" sz="2000" b="0" i="1" smtClean="0">
+                                <a:latin typeface="Cambria Math" panose="02040503050406030204" pitchFamily="18" charset="0"/>
+                              </a:rPr>
+                              <m:t>1</m:t>
+                            </m:r>
+                          </m:sub>
+                          <m:sup>
+                            <m:r>
+                              <a:rPr lang="en-US" altLang="zh-CN" sz="2000" b="0" i="1" smtClean="0">
+                                <a:latin typeface="Cambria Math" panose="02040503050406030204" pitchFamily="18" charset="0"/>
+                              </a:rPr>
+                              <m:t>2</m:t>
+                            </m:r>
+                          </m:sup>
+                        </m:sSubSup>
+                      </m:num>
+                      <m:den>
+                        <m:sSubSup>
+                          <m:sSubSupPr>
+                            <m:ctrlPr>
+                              <a:rPr lang="en-US" altLang="zh-CN" sz="2000" b="0" i="1" smtClean="0">
+                                <a:latin typeface="Cambria Math" panose="02040503050406030204" pitchFamily="18" charset="0"/>
+                              </a:rPr>
+                            </m:ctrlPr>
+                          </m:sSubSupPr>
+                          <m:e>
+                            <m:r>
+                              <a:rPr lang="en-US" altLang="zh-CN" sz="2000" b="0" i="1" smtClean="0">
+                                <a:latin typeface="Cambria Math" panose="02040503050406030204" pitchFamily="18" charset="0"/>
+                              </a:rPr>
+                              <m:t>𝑟</m:t>
+                            </m:r>
+                          </m:e>
+                          <m:sub>
+                            <m:r>
+                              <a:rPr lang="en-US" altLang="zh-CN" sz="2000" b="0" i="1" smtClean="0">
+                                <a:latin typeface="Cambria Math" panose="02040503050406030204" pitchFamily="18" charset="0"/>
+                              </a:rPr>
+                              <m:t>𝑗</m:t>
+                            </m:r>
+                          </m:sub>
+                          <m:sup>
+                            <m:r>
+                              <a:rPr lang="en-US" altLang="zh-CN" sz="2000" b="0" i="1" smtClean="0">
+                                <a:latin typeface="Cambria Math" panose="02040503050406030204" pitchFamily="18" charset="0"/>
+                              </a:rPr>
+                              <m:t>2</m:t>
+                            </m:r>
+                          </m:sup>
+                        </m:sSubSup>
+                        <m:r>
+                          <a:rPr lang="en-US" altLang="zh-CN" sz="2000" b="0" i="1" smtClean="0">
+                            <a:latin typeface="Cambria Math" panose="02040503050406030204" pitchFamily="18" charset="0"/>
+                          </a:rPr>
+                          <m:t>−</m:t>
+                        </m:r>
+                        <m:sSubSup>
+                          <m:sSubSupPr>
+                            <m:ctrlPr>
+                              <a:rPr lang="en-US" altLang="zh-CN" sz="2000" b="0" i="1" smtClean="0">
+                                <a:latin typeface="Cambria Math" panose="02040503050406030204" pitchFamily="18" charset="0"/>
+                              </a:rPr>
+                            </m:ctrlPr>
+                          </m:sSubSupPr>
+                          <m:e>
+                            <m:r>
+                              <a:rPr lang="en-US" altLang="zh-CN" sz="2000" b="0" i="1" smtClean="0">
+                                <a:latin typeface="Cambria Math" panose="02040503050406030204" pitchFamily="18" charset="0"/>
+                              </a:rPr>
+                              <m:t>𝑟</m:t>
+                            </m:r>
+                          </m:e>
+                          <m:sub>
+                            <m:r>
+                              <a:rPr lang="en-US" altLang="zh-CN" sz="2000" b="0" i="1" smtClean="0">
+                                <a:latin typeface="Cambria Math" panose="02040503050406030204" pitchFamily="18" charset="0"/>
+                              </a:rPr>
+                              <m:t>𝑗</m:t>
+                            </m:r>
+                            <m:r>
+                              <a:rPr lang="en-US" altLang="zh-CN" sz="2000" b="0" i="1" smtClean="0">
+                                <a:latin typeface="Cambria Math" panose="02040503050406030204" pitchFamily="18" charset="0"/>
+                              </a:rPr>
+                              <m:t>−</m:t>
+                            </m:r>
+                            <m:r>
+                              <a:rPr lang="en-US" altLang="zh-CN" sz="2000" b="0" i="1" smtClean="0">
+                                <a:latin typeface="Cambria Math" panose="02040503050406030204" pitchFamily="18" charset="0"/>
+                              </a:rPr>
+                              <m:t>1</m:t>
+                            </m:r>
+                          </m:sub>
+                          <m:sup>
+                            <m:r>
+                              <a:rPr lang="en-US" altLang="zh-CN" sz="2000" b="0" i="1" smtClean="0">
+                                <a:latin typeface="Cambria Math" panose="02040503050406030204" pitchFamily="18" charset="0"/>
+                              </a:rPr>
+                              <m:t>2</m:t>
+                            </m:r>
+                          </m:sup>
+                        </m:sSubSup>
+                      </m:den>
+                    </m:f>
+                    <m:r>
+                      <a:rPr lang="en-US" altLang="zh-CN" sz="2000" b="0" i="1" smtClean="0">
+                        <a:latin typeface="Cambria Math" panose="02040503050406030204" pitchFamily="18" charset="0"/>
+                      </a:rPr>
+                      <m:t>𝐹𝑆𝑅</m:t>
+                    </m:r>
+                  </m:oMath>
+                </a14:m>
+                <a:r>
+                  <a:rPr lang="zh-CN" altLang="en-US" sz="2000" dirty="0"/>
+                  <a:t>，转化为</a:t>
+                </a:r>
+                <a14:m>
+                  <m:oMath xmlns:m="http://schemas.openxmlformats.org/officeDocument/2006/math">
+                    <m:sSub>
+                      <m:sSubPr>
+                        <m:ctrlPr>
+                          <a:rPr lang="en-US" altLang="zh-CN" sz="2000" i="1">
+                            <a:latin typeface="Cambria Math" panose="02040503050406030204" pitchFamily="18" charset="0"/>
+                          </a:rPr>
+                        </m:ctrlPr>
+                      </m:sSubPr>
+                      <m:e>
+                        <m:r>
+                          <a:rPr lang="en-US" altLang="zh-CN" sz="2000" i="1">
+                            <a:latin typeface="Cambria Math" panose="02040503050406030204" pitchFamily="18" charset="0"/>
+                          </a:rPr>
+                          <m:t>𝐼</m:t>
+                        </m:r>
+                      </m:e>
+                      <m:sub>
+                        <m:r>
+                          <a:rPr lang="en-US" altLang="zh-CN" sz="2000" i="1">
+                            <a:latin typeface="Cambria Math" panose="02040503050406030204" pitchFamily="18" charset="0"/>
+                          </a:rPr>
+                          <m:t>𝑟𝑒𝑐</m:t>
+                        </m:r>
+                      </m:sub>
+                    </m:sSub>
+                    <m:d>
+                      <m:dPr>
+                        <m:ctrlPr>
+                          <a:rPr lang="en-US" altLang="zh-CN" sz="2000" b="0" i="1" smtClean="0">
+                            <a:latin typeface="Cambria Math" panose="02040503050406030204" pitchFamily="18" charset="0"/>
+                          </a:rPr>
+                        </m:ctrlPr>
+                      </m:dPr>
+                      <m:e>
+                        <m:r>
+                          <a:rPr lang="en-US" altLang="zh-CN" sz="2000" b="0" i="1" smtClean="0">
+                            <a:latin typeface="Cambria Math" panose="02040503050406030204" pitchFamily="18" charset="0"/>
+                          </a:rPr>
+                          <m:t>𝜈</m:t>
+                        </m:r>
+                      </m:e>
+                    </m:d>
+                    <m:r>
+                      <a:rPr lang="zh-CN" altLang="en-US" sz="2000" i="1" smtClean="0">
+                        <a:latin typeface="Cambria Math" panose="02040503050406030204" pitchFamily="18" charset="0"/>
+                      </a:rPr>
+                      <m:t>后</m:t>
+                    </m:r>
+                  </m:oMath>
+                </a14:m>
+                <a:r>
+                  <a:rPr lang="zh-CN" altLang="en-US" sz="2000" dirty="0"/>
+                  <a:t>按</a:t>
+                </a:r>
+                <a14:m>
+                  <m:oMath xmlns:m="http://schemas.openxmlformats.org/officeDocument/2006/math">
+                    <m:sSub>
+                      <m:sSubPr>
+                        <m:ctrlPr>
+                          <a:rPr lang="en-US" altLang="zh-CN" sz="2000" i="1">
+                            <a:latin typeface="Cambria Math" panose="02040503050406030204" pitchFamily="18" charset="0"/>
+                          </a:rPr>
+                        </m:ctrlPr>
+                      </m:sSubPr>
+                      <m:e>
+                        <m:r>
+                          <a:rPr lang="en-US" altLang="zh-CN" sz="2000" i="1">
+                            <a:latin typeface="Cambria Math" panose="02040503050406030204" pitchFamily="18" charset="0"/>
+                          </a:rPr>
+                          <m:t>𝐼</m:t>
+                        </m:r>
+                      </m:e>
+                      <m:sub>
+                        <m:r>
+                          <a:rPr lang="en-US" altLang="zh-CN" sz="2000" i="1">
+                            <a:latin typeface="Cambria Math" panose="02040503050406030204" pitchFamily="18" charset="0"/>
+                          </a:rPr>
+                          <m:t>𝑟𝑒𝑐</m:t>
+                        </m:r>
+                      </m:sub>
+                    </m:sSub>
+                    <m:d>
+                      <m:dPr>
+                        <m:ctrlPr>
+                          <a:rPr lang="en-US" altLang="zh-CN" sz="2000" i="1">
+                            <a:latin typeface="Cambria Math" panose="02040503050406030204" pitchFamily="18" charset="0"/>
+                          </a:rPr>
+                        </m:ctrlPr>
+                      </m:dPr>
+                      <m:e>
+                        <m:r>
+                          <a:rPr lang="en-US" altLang="zh-CN" sz="2000" i="1">
+                            <a:latin typeface="Cambria Math" panose="02040503050406030204" pitchFamily="18" charset="0"/>
+                          </a:rPr>
+                          <m:t>𝜈</m:t>
+                        </m:r>
+                      </m:e>
+                    </m:d>
+                    <m:r>
+                      <a:rPr lang="en-US" altLang="zh-CN" sz="2000" b="0" i="1" smtClean="0">
+                        <a:latin typeface="Cambria Math" panose="02040503050406030204" pitchFamily="18" charset="0"/>
+                      </a:rPr>
+                      <m:t>=</m:t>
+                    </m:r>
+                    <m:r>
+                      <a:rPr lang="en-US" altLang="zh-CN" sz="2000" b="0" i="1" smtClean="0">
+                        <a:latin typeface="Cambria Math" panose="02040503050406030204" pitchFamily="18" charset="0"/>
+                      </a:rPr>
+                      <m:t>𝐼</m:t>
+                    </m:r>
+                    <m:d>
+                      <m:dPr>
+                        <m:ctrlPr>
+                          <a:rPr lang="en-US" altLang="zh-CN" sz="2000" b="0" i="1" smtClean="0">
+                            <a:latin typeface="Cambria Math" panose="02040503050406030204" pitchFamily="18" charset="0"/>
+                          </a:rPr>
+                        </m:ctrlPr>
+                      </m:dPr>
+                      <m:e>
+                        <m:r>
+                          <a:rPr lang="en-US" altLang="zh-CN" sz="2000" b="0" i="1" smtClean="0">
+                            <a:latin typeface="Cambria Math" panose="02040503050406030204" pitchFamily="18" charset="0"/>
+                          </a:rPr>
+                          <m:t>𝜈</m:t>
+                        </m:r>
+                      </m:e>
+                    </m:d>
+                    <m:r>
+                      <a:rPr lang="en-US" altLang="zh-CN" sz="2000" i="1">
+                        <a:latin typeface="Cambria Math" panose="02040503050406030204" pitchFamily="18" charset="0"/>
+                        <a:ea typeface="Cambria Math" panose="02040503050406030204" pitchFamily="18" charset="0"/>
+                      </a:rPr>
+                      <m:t>⊗</m:t>
+                    </m:r>
+                    <m:r>
+                      <a:rPr lang="en-US" altLang="zh-CN" sz="2000" b="0" i="1" smtClean="0">
+                        <a:latin typeface="Cambria Math" panose="02040503050406030204" pitchFamily="18" charset="0"/>
+                        <a:ea typeface="Cambria Math" panose="02040503050406030204" pitchFamily="18" charset="0"/>
+                      </a:rPr>
+                      <m:t>𝐴𝑖𝑟𝑦</m:t>
+                    </m:r>
+                    <m:r>
+                      <a:rPr lang="en-US" altLang="zh-CN" sz="2000" b="0" i="1" smtClean="0">
+                        <a:latin typeface="Cambria Math" panose="02040503050406030204" pitchFamily="18" charset="0"/>
+                        <a:ea typeface="Cambria Math" panose="02040503050406030204" pitchFamily="18" charset="0"/>
+                      </a:rPr>
+                      <m:t>(</m:t>
+                    </m:r>
+                    <m:r>
+                      <a:rPr lang="en-US" altLang="zh-CN" sz="2000" b="0" i="1" smtClean="0">
+                        <a:latin typeface="Cambria Math" panose="02040503050406030204" pitchFamily="18" charset="0"/>
+                        <a:ea typeface="Cambria Math" panose="02040503050406030204" pitchFamily="18" charset="0"/>
+                      </a:rPr>
+                      <m:t>𝜈</m:t>
+                    </m:r>
+                    <m:r>
+                      <a:rPr lang="en-US" altLang="zh-CN" sz="2000" b="0" i="1" smtClean="0">
+                        <a:latin typeface="Cambria Math" panose="02040503050406030204" pitchFamily="18" charset="0"/>
+                        <a:ea typeface="Cambria Math" panose="02040503050406030204" pitchFamily="18" charset="0"/>
+                      </a:rPr>
+                      <m:t>)  </m:t>
+                    </m:r>
+                  </m:oMath>
+                </a14:m>
+                <a:r>
+                  <a:rPr lang="zh-CN" altLang="en-US" sz="2000" dirty="0"/>
+                  <a:t>拟合得到布里渊频移与展宽。</a:t>
+                </a:r>
                 <a:endParaRPr lang="en-US" altLang="zh-CN" sz="2000" dirty="0"/>
               </a:p>
               <a:p>
                 <a:pPr marL="0" indent="0">
                   <a:buNone/>
                 </a:pPr>
-                <a:endParaRPr lang="zh-CN" altLang="en-US" sz="2400" dirty="0"/>
+                <a:endParaRPr lang="zh-CN" altLang="en-US" sz="2000" dirty="0"/>
               </a:p>
             </p:txBody>
           </p:sp>
         </mc:Choice>
-        <mc:Fallback xmlns="">
+        <mc:Fallback>
           <p:sp>
             <p:nvSpPr>
-              <p:cNvPr id="12" name="内容占位符 11">
-                <a:extLst>
-                  <a:ext uri="{FF2B5EF4-FFF2-40B4-BE49-F238E27FC236}">
-                    <a16:creationId xmlns:a16="http://schemas.microsoft.com/office/drawing/2014/main" id="{53B75E95-4F0E-816F-4989-476932E11FF9}"/>
-                  </a:ext>
-                </a:extLst>
-              </p:cNvPr>
+              <p:cNvPr id="12" name="内容占位符 11"/>
               <p:cNvSpPr>
-                <a:spLocks noGrp="1" noRot="1" noChangeAspect="1" noMove="1" noResize="1" noEditPoints="1" noAdjustHandles="1" noChangeArrowheads="1" noChangeShapeType="1" noTextEdit="1"/>
+                <a:spLocks noRot="1" noChangeAspect="1" noMove="1" noResize="1" noEditPoints="1" noAdjustHandles="1" noChangeArrowheads="1" noChangeShapeType="1" noTextEdit="1"/>
               </p:cNvSpPr>
               <p:nvPr>
                 <p:ph idx="1"/>
@@ -4313,13 +4154,13 @@
             </p:nvSpPr>
             <p:spPr>
               <a:xfrm>
-                <a:off x="101245" y="1412776"/>
-                <a:ext cx="9595155" cy="4351338"/>
+                <a:off x="258927" y="1376825"/>
+                <a:ext cx="7277233" cy="5098617"/>
               </a:xfrm>
-              <a:blipFill>
-                <a:blip r:embed="rId4"/>
+              <a:blipFill rotWithShape="1">
+                <a:blip r:embed="rId2"/>
                 <a:stretch>
-                  <a:fillRect l="-635"/>
+                  <a:fillRect l="-7" t="-3" r="8" b="7"/>
                 </a:stretch>
               </a:blipFill>
             </p:spPr>
@@ -4340,13 +4181,88 @@
       </mc:AlternateContent>
       <p:pic>
         <p:nvPicPr>
-          <p:cNvPr id="5" name="图片 4">
-            <a:extLst>
-              <a:ext uri="{FF2B5EF4-FFF2-40B4-BE49-F238E27FC236}">
-                <a16:creationId xmlns:a16="http://schemas.microsoft.com/office/drawing/2014/main" id="{0C770F1A-00E6-3DE2-74E7-ED09B2E3EBD1}"/>
-              </a:ext>
-            </a:extLst>
-          </p:cNvPr>
+          <p:cNvPr id="13" name="图片 12"/>
+          <p:cNvPicPr>
+            <a:picLocks noChangeAspect="1"/>
+          </p:cNvPicPr>
+          <p:nvPr/>
+        </p:nvPicPr>
+        <p:blipFill>
+          <a:blip r:embed="rId3"/>
+          <a:stretch>
+            <a:fillRect/>
+          </a:stretch>
+        </p:blipFill>
+        <p:spPr>
+          <a:xfrm>
+            <a:off x="7480815" y="1268760"/>
+            <a:ext cx="4452258" cy="3469292"/>
+          </a:xfrm>
+          <a:prstGeom prst="rect">
+            <a:avLst/>
+          </a:prstGeom>
+        </p:spPr>
+      </p:pic>
+      <p:sp>
+        <p:nvSpPr>
+          <p:cNvPr id="17" name="文本框 16"/>
+          <p:cNvSpPr txBox="1"/>
+          <p:nvPr/>
+        </p:nvSpPr>
+        <p:spPr>
+          <a:xfrm>
+            <a:off x="51095" y="6475442"/>
+            <a:ext cx="4524975" cy="307777"/>
+          </a:xfrm>
+          <a:prstGeom prst="rect">
+            <a:avLst/>
+          </a:prstGeom>
+          <a:noFill/>
+        </p:spPr>
+        <p:txBody>
+          <a:bodyPr wrap="square">
+            <a:spAutoFit/>
+          </a:bodyPr>
+          <a:lstStyle/>
+          <a:p>
+            <a:pPr fontAlgn="base"/>
+            <a:r>
+              <a:rPr lang="zh-CN" altLang="zh-CN" sz="700" b="0" i="0" dirty="0">
+                <a:solidFill>
+                  <a:schemeClr val="tx1"/>
+                </a:solidFill>
+                <a:effectLst/>
+                <a:latin typeface="+mn-lt"/>
+              </a:rPr>
+              <a:t>Experimental analysis on the rapid measurement of a high precision Brillouin scattering spectrum in water using a Fabry–Pérot etalon</a:t>
+            </a:r>
+            <a:r>
+              <a:rPr lang="en-US" altLang="zh-CN" sz="700" dirty="0"/>
+              <a:t>: </a:t>
+            </a:r>
+            <a:r>
+              <a:rPr lang="en-US" altLang="zh-CN" sz="700" dirty="0">
+                <a:hlinkClick r:id="rId4"/>
+              </a:rPr>
+              <a:t>http://dx.doi.org/10.1088/1612-2011/13/5/055701</a:t>
+            </a:r>
+            <a:r>
+              <a:rPr lang="en-US" altLang="zh-CN" sz="700" dirty="0"/>
+              <a:t> </a:t>
+            </a:r>
+            <a:endParaRPr lang="zh-CN" altLang="zh-CN" sz="700" b="0" i="0" dirty="0">
+              <a:solidFill>
+                <a:srgbClr val="333333"/>
+              </a:solidFill>
+              <a:effectLst/>
+              <a:latin typeface="-apple-system"/>
+            </a:endParaRPr>
+          </a:p>
+        </p:txBody>
+      </p:sp>
+      <p:pic>
+        <p:nvPicPr>
+          <p:cNvPr id="3" name="图片 2"/>
           <p:cNvPicPr>
             <a:picLocks noChangeAspect="1"/>
           </p:cNvPicPr>
@@ -4360,8 +4276,8 @@
         </p:blipFill>
         <p:spPr>
           <a:xfrm>
-            <a:off x="101245" y="4697661"/>
-            <a:ext cx="7199250" cy="1421569"/>
+            <a:off x="258927" y="4705541"/>
+            <a:ext cx="4304159" cy="1548391"/>
           </a:xfrm>
           <a:prstGeom prst="rect">
             <a:avLst/>
@@ -4370,29 +4286,22 @@
       </p:pic>
       <p:pic>
         <p:nvPicPr>
-          <p:cNvPr id="7" name="图片 6">
-            <a:extLst>
-              <a:ext uri="{FF2B5EF4-FFF2-40B4-BE49-F238E27FC236}">
-                <a16:creationId xmlns:a16="http://schemas.microsoft.com/office/drawing/2014/main" id="{48B633A5-738B-EBB4-DE3D-2944C36FCF82}"/>
-              </a:ext>
-            </a:extLst>
-          </p:cNvPr>
+          <p:cNvPr id="5" name="图片 4"/>
           <p:cNvPicPr>
-            <a:picLocks/>
+            <a:picLocks noChangeAspect="1"/>
           </p:cNvPicPr>
           <p:nvPr/>
         </p:nvPicPr>
         <p:blipFill>
           <a:blip r:embed="rId6"/>
-          <a:srcRect l="9269"/>
           <a:stretch>
             <a:fillRect/>
           </a:stretch>
         </p:blipFill>
         <p:spPr>
           <a:xfrm>
-            <a:off x="9287716" y="2395111"/>
-            <a:ext cx="2797548" cy="1944216"/>
+            <a:off x="8256240" y="5045759"/>
+            <a:ext cx="3384556" cy="1429683"/>
           </a:xfrm>
           <a:prstGeom prst="rect">
             <a:avLst/>
@@ -4401,90 +4310,22 @@
       </p:pic>
       <p:pic>
         <p:nvPicPr>
-          <p:cNvPr id="3" name="图片 2" descr="19503.webp">
-            <a:extLst>
-              <a:ext uri="{FF2B5EF4-FFF2-40B4-BE49-F238E27FC236}">
-                <a16:creationId xmlns:a16="http://schemas.microsoft.com/office/drawing/2014/main" id="{E02070B6-B1CB-594E-53ED-58FF3E126618}"/>
-              </a:ext>
-            </a:extLst>
-          </p:cNvPr>
+          <p:cNvPr id="7" name="图片 6"/>
           <p:cNvPicPr>
-            <a:picLocks/>
+            <a:picLocks noChangeAspect="1"/>
           </p:cNvPicPr>
           <p:nvPr/>
         </p:nvPicPr>
         <p:blipFill>
           <a:blip r:embed="rId7"/>
-          <a:srcRect l="8221" t="49839" r="5790" b="11554"/>
           <a:stretch>
             <a:fillRect/>
           </a:stretch>
         </p:blipFill>
         <p:spPr>
           <a:xfrm>
-            <a:off x="9287716" y="1266841"/>
-            <a:ext cx="2520280" cy="1131553"/>
-          </a:xfrm>
-          <a:prstGeom prst="rect">
-            <a:avLst/>
-          </a:prstGeom>
-        </p:spPr>
-      </p:pic>
-      <p:pic>
-        <p:nvPicPr>
-          <p:cNvPr id="4" name="图片 3" descr="&#10;       图42B:&amp;nbsp;反射镜反射率为99.7％、80％和4％的法布里－珀罗干涉仪的模式光谱，分别由蓝色，红色和绿色曲线表示。99.7％的反射率对应于SA200系列，其自由光谱范围为1.5 GHz。4％的反射率对应于玻璃板平行表面之间反射所产生的典型边缘效应。&#10;    ">
-            <a:extLst>
-              <a:ext uri="{FF2B5EF4-FFF2-40B4-BE49-F238E27FC236}">
-                <a16:creationId xmlns:a16="http://schemas.microsoft.com/office/drawing/2014/main" id="{1BBC05D9-4E8B-9E83-A2FF-0337CF0EFFB8}"/>
-              </a:ext>
-            </a:extLst>
-          </p:cNvPr>
-          <p:cNvPicPr>
-            <a:picLocks noChangeAspect="1"/>
-          </p:cNvPicPr>
-          <p:nvPr/>
-        </p:nvPicPr>
-        <p:blipFill>
-          <a:blip r:embed="rId8"/>
-          <a:stretch>
-            <a:fillRect/>
-          </a:stretch>
-        </p:blipFill>
-        <p:spPr>
-          <a:xfrm>
-            <a:off x="6744072" y="4475630"/>
-            <a:ext cx="3341606" cy="2176328"/>
-          </a:xfrm>
-          <a:prstGeom prst="rect">
-            <a:avLst/>
-          </a:prstGeom>
-        </p:spPr>
-      </p:pic>
-      <p:pic>
-        <p:nvPicPr>
-          <p:cNvPr id="6" name="图片 5" descr="ttn298338.webp">
-            <a:extLst>
-              <a:ext uri="{FF2B5EF4-FFF2-40B4-BE49-F238E27FC236}">
-                <a16:creationId xmlns:a16="http://schemas.microsoft.com/office/drawing/2014/main" id="{264DAC43-ACDE-EEBE-574C-5DADD916CF1C}"/>
-              </a:ext>
-            </a:extLst>
-          </p:cNvPr>
-          <p:cNvPicPr>
-            <a:picLocks/>
-          </p:cNvPicPr>
-          <p:nvPr/>
-        </p:nvPicPr>
-        <p:blipFill>
-          <a:blip r:embed="rId9"/>
-          <a:srcRect l="6951" t="22701" r="8001" b="22700"/>
-          <a:stretch>
-            <a:fillRect/>
-          </a:stretch>
-        </p:blipFill>
-        <p:spPr>
-          <a:xfrm>
-            <a:off x="9867744" y="4697661"/>
-            <a:ext cx="2052228" cy="1856779"/>
+            <a:off x="4481489" y="3988205"/>
+            <a:ext cx="3229021" cy="2669019"/>
           </a:xfrm>
           <a:prstGeom prst="rect">
             <a:avLst/>
@@ -4492,11 +4333,6 @@
         </p:spPr>
       </p:pic>
     </p:spTree>
-    <p:extLst>
-      <p:ext uri="{BB962C8B-B14F-4D97-AF65-F5344CB8AC3E}">
-        <p14:creationId xmlns:p14="http://schemas.microsoft.com/office/powerpoint/2010/main" val="1308170422"/>
-      </p:ext>
-    </p:extLst>
   </p:cSld>
   <p:clrMapOvr>
     <a:masterClrMapping/>
@@ -4510,7 +4346,7 @@
     <p:bg>
       <p:bgPr>
         <a:blipFill dpi="0" rotWithShape="1">
-          <a:blip r:embed="rId3">
+          <a:blip r:embed="rId1">
             <a:lum/>
           </a:blip>
           <a:srcRect/>
@@ -4523,13 +4359,7 @@
     </p:bg>
     <p:spTree>
       <p:nvGrpSpPr>
-        <p:cNvPr id="1" name="">
-          <a:extLst>
-            <a:ext uri="{FF2B5EF4-FFF2-40B4-BE49-F238E27FC236}">
-              <a16:creationId xmlns:a16="http://schemas.microsoft.com/office/drawing/2014/main" id="{522DF92D-E8DB-C26D-5996-167386E1669E}"/>
-            </a:ext>
-          </a:extLst>
-        </p:cNvPr>
+        <p:cNvPr id="1" name=""/>
         <p:cNvGrpSpPr/>
         <p:nvPr/>
       </p:nvGrpSpPr>
@@ -4543,13 +4373,7 @@
       </p:grpSpPr>
       <p:sp>
         <p:nvSpPr>
-          <p:cNvPr id="7179" name="Rectangle 11">
-            <a:extLst>
-              <a:ext uri="{FF2B5EF4-FFF2-40B4-BE49-F238E27FC236}">
-                <a16:creationId xmlns:a16="http://schemas.microsoft.com/office/drawing/2014/main" id="{031BC09B-8256-220A-2E6A-99B135827418}"/>
-              </a:ext>
-            </a:extLst>
-          </p:cNvPr>
+          <p:cNvPr id="7179" name="Rectangle 11"/>
           <p:cNvSpPr>
             <a:spLocks noGrp="1" noChangeArrowheads="1"/>
           </p:cNvSpPr>
@@ -4577,7 +4401,7 @@
                 <a:latin typeface="华文中宋" panose="02010600040101010101" pitchFamily="2" charset="-122"/>
                 <a:ea typeface="华文中宋" panose="02010600040101010101" pitchFamily="2" charset="-122"/>
               </a:rPr>
-              <a:t>标准具</a:t>
+              <a:t>理论基础与方案</a:t>
             </a:r>
             <a:endParaRPr lang="zh-CN" altLang="zh-CN" sz="4000" dirty="0">
               <a:solidFill>
@@ -4589,121 +4413,1724 @@
           </a:p>
         </p:txBody>
       </p:sp>
-      <p:sp>
-        <p:nvSpPr>
-          <p:cNvPr id="12" name="内容占位符 11">
-            <a:extLst>
-              <a:ext uri="{FF2B5EF4-FFF2-40B4-BE49-F238E27FC236}">
-                <a16:creationId xmlns:a16="http://schemas.microsoft.com/office/drawing/2014/main" id="{4DAA044C-43BE-A64E-2DCD-7A02391B5E93}"/>
-              </a:ext>
-            </a:extLst>
-          </p:cNvPr>
-          <p:cNvSpPr>
-            <a:spLocks noGrp="1"/>
-          </p:cNvSpPr>
-          <p:nvPr>
-            <p:ph idx="1"/>
-          </p:nvPr>
-        </p:nvSpPr>
-        <p:spPr>
-          <a:xfrm>
-            <a:off x="258926" y="1376826"/>
-            <a:ext cx="9235115" cy="444006"/>
-          </a:xfrm>
-        </p:spPr>
-        <p:txBody>
-          <a:bodyPr>
-            <a:normAutofit/>
-          </a:bodyPr>
-          <a:lstStyle/>
-          <a:p>
-            <a:pPr marL="0" indent="0">
-              <a:lnSpc>
-                <a:spcPct val="100000"/>
-              </a:lnSpc>
-              <a:buNone/>
-            </a:pPr>
-            <a:r>
-              <a:rPr lang="en-US" altLang="zh-CN" sz="2000" dirty="0" err="1"/>
-              <a:t>Lightmachinery</a:t>
-            </a:r>
-            <a:r>
-              <a:rPr lang="zh-CN" altLang="en-US" sz="2000" dirty="0"/>
-              <a:t>的</a:t>
-            </a:r>
-            <a:r>
-              <a:rPr lang="en-US" altLang="zh-CN" sz="2000" dirty="0"/>
-              <a:t>Silica</a:t>
-            </a:r>
-            <a:r>
-              <a:rPr lang="zh-CN" altLang="en-US" sz="2000" dirty="0"/>
-              <a:t>标准具，自由光谱范围</a:t>
-            </a:r>
-            <a:r>
-              <a:rPr lang="en-US" altLang="zh-CN" sz="2000" dirty="0"/>
-              <a:t>15GHz</a:t>
-            </a:r>
-            <a:r>
-              <a:rPr lang="zh-CN" altLang="en-US" sz="2000" dirty="0"/>
-              <a:t>，</a:t>
-            </a:r>
-            <a:r>
-              <a:rPr lang="it-IT" altLang="zh-CN" sz="2000" dirty="0"/>
-              <a:t> </a:t>
-            </a:r>
-            <a:r>
-              <a:rPr lang="zh-CN" altLang="en-US" sz="2000" dirty="0"/>
-              <a:t>分辨率</a:t>
-            </a:r>
-            <a:r>
-              <a:rPr lang="en-US" altLang="zh-CN" sz="2000" dirty="0"/>
-              <a:t>500MHz</a:t>
-            </a:r>
-            <a:r>
-              <a:rPr lang="zh-CN" altLang="en-US" sz="2000" dirty="0"/>
-              <a:t>。</a:t>
-            </a:r>
-            <a:endParaRPr lang="en-US" altLang="zh-CN" sz="2000" dirty="0"/>
-          </a:p>
-          <a:p>
-            <a:pPr marL="0" indent="0">
-              <a:buNone/>
-            </a:pPr>
-            <a:endParaRPr lang="en-US" altLang="zh-CN" sz="2000" dirty="0"/>
-          </a:p>
-          <a:p>
-            <a:pPr marL="0" indent="0">
-              <a:buNone/>
-            </a:pPr>
-            <a:endParaRPr lang="zh-CN" altLang="en-US" sz="2400" dirty="0"/>
-          </a:p>
-        </p:txBody>
-      </p:sp>
+      <mc:AlternateContent xmlns:mc="http://schemas.openxmlformats.org/markup-compatibility/2006">
+        <mc:Choice xmlns:a14="http://schemas.microsoft.com/office/drawing/2010/main" Requires="a14">
+          <p:sp>
+            <p:nvSpPr>
+              <p:cNvPr id="12" name="内容占位符 11"/>
+              <p:cNvSpPr>
+                <a:spLocks noGrp="1"/>
+              </p:cNvSpPr>
+              <p:nvPr>
+                <p:ph idx="1"/>
+              </p:nvPr>
+            </p:nvSpPr>
+            <p:spPr>
+              <a:xfrm>
+                <a:off x="193857" y="1254403"/>
+                <a:ext cx="7806381" cy="5250347"/>
+              </a:xfrm>
+              <a:ln>
+                <a:solidFill>
+                  <a:schemeClr val="bg1"/>
+                </a:solidFill>
+              </a:ln>
+            </p:spPr>
+            <p:txBody>
+              <a:bodyPr>
+                <a:normAutofit/>
+              </a:bodyPr>
+              <a:lstStyle/>
+              <a:p>
+                <a:pPr marL="0" indent="0">
+                  <a:lnSpc>
+                    <a:spcPct val="100000"/>
+                  </a:lnSpc>
+                  <a:buNone/>
+                </a:pPr>
+                <a:r>
+                  <a:rPr lang="zh-CN" altLang="en-US" sz="2000" dirty="0"/>
+                  <a:t>使用</a:t>
+                </a:r>
+                <a:r>
+                  <a:rPr lang="en-US" altLang="zh-CN" sz="2000" dirty="0"/>
+                  <a:t>FP</a:t>
+                </a:r>
+                <a:r>
+                  <a:rPr lang="zh-CN" altLang="en-US" sz="2000" dirty="0"/>
+                  <a:t>标准具对布里渊散射光谱测量，理论上可一次性得到输出的二维同心环图样，包含光谱信息。</a:t>
+                </a:r>
+                <a:endParaRPr lang="en-US" altLang="zh-CN" sz="2000" dirty="0"/>
+              </a:p>
+              <a:p>
+                <a:pPr marL="0" indent="0">
+                  <a:lnSpc>
+                    <a:spcPct val="100000"/>
+                  </a:lnSpc>
+                  <a:buNone/>
+                </a:pPr>
+                <a:r>
+                  <a:rPr lang="zh-CN" altLang="en-US" sz="2000" dirty="0"/>
+                  <a:t>标准具中相邻两束光的相位差</a:t>
+                </a:r>
+                <a14:m>
+                  <m:oMath xmlns:m="http://schemas.openxmlformats.org/officeDocument/2006/math">
+                    <m:r>
+                      <m:rPr>
+                        <m:sty m:val="p"/>
+                      </m:rPr>
+                      <a:rPr lang="en-US" altLang="zh-CN" sz="2000" b="0" i="0" smtClean="0">
+                        <a:latin typeface="Cambria Math" panose="02040503050406030204" pitchFamily="18" charset="0"/>
+                      </a:rPr>
+                      <m:t>Ψ</m:t>
+                    </m:r>
+                    <m:r>
+                      <a:rPr lang="en-US" altLang="zh-CN" sz="2000" b="0" i="1" smtClean="0">
+                        <a:latin typeface="Cambria Math" panose="02040503050406030204" pitchFamily="18" charset="0"/>
+                      </a:rPr>
+                      <m:t>(</m:t>
+                    </m:r>
+                    <m:r>
+                      <a:rPr lang="en-US" altLang="zh-CN" sz="2000" b="0" i="1" smtClean="0">
+                        <a:latin typeface="Cambria Math" panose="02040503050406030204" pitchFamily="18" charset="0"/>
+                      </a:rPr>
+                      <m:t>𝜃</m:t>
+                    </m:r>
+                    <m:r>
+                      <a:rPr lang="en-US" altLang="zh-CN" sz="2000" b="0" i="1" smtClean="0">
+                        <a:latin typeface="Cambria Math" panose="02040503050406030204" pitchFamily="18" charset="0"/>
+                      </a:rPr>
+                      <m:t>,</m:t>
+                    </m:r>
+                    <m:r>
+                      <a:rPr lang="en-US" altLang="zh-CN" sz="2000" b="0" i="1" smtClean="0">
+                        <a:latin typeface="Cambria Math" panose="02040503050406030204" pitchFamily="18" charset="0"/>
+                      </a:rPr>
+                      <m:t>𝜈</m:t>
+                    </m:r>
+                    <m:r>
+                      <a:rPr lang="en-US" altLang="zh-CN" sz="2000" b="0" i="1" smtClean="0">
+                        <a:latin typeface="Cambria Math" panose="02040503050406030204" pitchFamily="18" charset="0"/>
+                      </a:rPr>
+                      <m:t>)=</m:t>
+                    </m:r>
+                    <m:f>
+                      <m:fPr>
+                        <m:ctrlPr>
+                          <a:rPr lang="en-US" altLang="zh-CN" sz="2000" b="0" i="1" smtClean="0">
+                            <a:latin typeface="Cambria Math" panose="02040503050406030204" pitchFamily="18" charset="0"/>
+                          </a:rPr>
+                        </m:ctrlPr>
+                      </m:fPr>
+                      <m:num>
+                        <m:r>
+                          <a:rPr lang="en-US" altLang="zh-CN" sz="2000" b="0" i="1" smtClean="0">
+                            <a:latin typeface="Cambria Math" panose="02040503050406030204" pitchFamily="18" charset="0"/>
+                          </a:rPr>
+                          <m:t>4</m:t>
+                        </m:r>
+                        <m:r>
+                          <a:rPr lang="en-US" altLang="zh-CN" sz="2000" b="0" i="1" smtClean="0">
+                            <a:latin typeface="Cambria Math" panose="02040503050406030204" pitchFamily="18" charset="0"/>
+                          </a:rPr>
+                          <m:t>𝜋</m:t>
+                        </m:r>
+                        <m:r>
+                          <a:rPr lang="en-US" altLang="zh-CN" sz="2000" b="0" i="1" smtClean="0">
+                            <a:latin typeface="Cambria Math" panose="02040503050406030204" pitchFamily="18" charset="0"/>
+                          </a:rPr>
+                          <m:t>𝑛𝑑</m:t>
+                        </m:r>
+                        <m:r>
+                          <a:rPr lang="en-US" altLang="zh-CN" sz="2000" b="0" i="1" smtClean="0">
+                            <a:latin typeface="Cambria Math" panose="02040503050406030204" pitchFamily="18" charset="0"/>
+                          </a:rPr>
+                          <m:t>𝜈</m:t>
+                        </m:r>
+                      </m:num>
+                      <m:den>
+                        <m:r>
+                          <a:rPr lang="en-US" altLang="zh-CN" sz="2000" b="0" i="1" smtClean="0">
+                            <a:latin typeface="Cambria Math" panose="02040503050406030204" pitchFamily="18" charset="0"/>
+                          </a:rPr>
+                          <m:t>𝑐</m:t>
+                        </m:r>
+                      </m:den>
+                    </m:f>
+                    <m:r>
+                      <m:rPr>
+                        <m:sty m:val="p"/>
+                      </m:rPr>
+                      <a:rPr lang="en-US" altLang="zh-CN" sz="2000" b="0" i="1" smtClean="0">
+                        <a:latin typeface="Cambria Math" panose="02040503050406030204" pitchFamily="18" charset="0"/>
+                      </a:rPr>
+                      <m:t>cos</m:t>
+                    </m:r>
+                    <m:r>
+                      <a:rPr lang="en-US" altLang="zh-CN" sz="2000" b="0" i="1" smtClean="0">
+                        <a:latin typeface="Cambria Math" panose="02040503050406030204" pitchFamily="18" charset="0"/>
+                      </a:rPr>
+                      <m:t>𝜃</m:t>
+                    </m:r>
+                    <m:r>
+                      <a:rPr lang="en-US" altLang="zh-CN" sz="2000" b="0" i="1" smtClean="0">
+                        <a:latin typeface="Cambria Math" panose="02040503050406030204" pitchFamily="18" charset="0"/>
+                      </a:rPr>
+                      <m:t> </m:t>
+                    </m:r>
+                  </m:oMath>
+                </a14:m>
+                <a:r>
+                  <a:rPr lang="zh-CN" altLang="en-US" sz="2000" dirty="0"/>
+                  <a:t>，根据多光束干涉的结果，可得透射光强</a:t>
+                </a:r>
+                <a:endParaRPr lang="en-US" altLang="zh-CN" sz="2000" dirty="0"/>
+              </a:p>
+              <a:p>
+                <a:pPr marL="0" indent="0">
+                  <a:lnSpc>
+                    <a:spcPct val="100000"/>
+                  </a:lnSpc>
+                  <a:buNone/>
+                </a:pPr>
+                <a:r>
+                  <a:rPr lang="zh-CN" altLang="en-US" sz="2000" dirty="0"/>
+                  <a:t>其中</a:t>
+                </a:r>
+                <a14:m>
+                  <m:oMath xmlns:m="http://schemas.openxmlformats.org/officeDocument/2006/math">
+                    <m:r>
+                      <a:rPr lang="en-US" altLang="zh-CN" sz="2000" b="0" i="1" smtClean="0">
+                        <a:latin typeface="Cambria Math" panose="02040503050406030204" pitchFamily="18" charset="0"/>
+                      </a:rPr>
+                      <m:t>𝐹</m:t>
+                    </m:r>
+                    <m:r>
+                      <a:rPr lang="en-US" altLang="zh-CN" sz="2000" b="0" i="1" smtClean="0">
+                        <a:latin typeface="Cambria Math" panose="02040503050406030204" pitchFamily="18" charset="0"/>
+                      </a:rPr>
+                      <m:t>=</m:t>
+                    </m:r>
+                    <m:f>
+                      <m:fPr>
+                        <m:ctrlPr>
+                          <a:rPr lang="en-US" altLang="zh-CN" sz="2000" b="0" i="1" smtClean="0">
+                            <a:latin typeface="Cambria Math" panose="02040503050406030204" pitchFamily="18" charset="0"/>
+                          </a:rPr>
+                        </m:ctrlPr>
+                      </m:fPr>
+                      <m:num>
+                        <m:r>
+                          <a:rPr lang="en-US" altLang="zh-CN" sz="2000" b="0" i="1" smtClean="0">
+                            <a:latin typeface="Cambria Math" panose="02040503050406030204" pitchFamily="18" charset="0"/>
+                          </a:rPr>
+                          <m:t>4</m:t>
+                        </m:r>
+                        <m:r>
+                          <a:rPr lang="en-US" altLang="zh-CN" sz="2000" b="0" i="1" smtClean="0">
+                            <a:latin typeface="Cambria Math" panose="02040503050406030204" pitchFamily="18" charset="0"/>
+                          </a:rPr>
+                          <m:t>𝑟</m:t>
+                        </m:r>
+                      </m:num>
+                      <m:den>
+                        <m:sSup>
+                          <m:sSupPr>
+                            <m:ctrlPr>
+                              <a:rPr lang="en-US" altLang="zh-CN" sz="2000" b="0" i="1" smtClean="0">
+                                <a:latin typeface="Cambria Math" panose="02040503050406030204" pitchFamily="18" charset="0"/>
+                              </a:rPr>
+                            </m:ctrlPr>
+                          </m:sSupPr>
+                          <m:e>
+                            <m:d>
+                              <m:dPr>
+                                <m:ctrlPr>
+                                  <a:rPr lang="en-US" altLang="zh-CN" sz="2000" b="0" i="1" smtClean="0">
+                                    <a:latin typeface="Cambria Math" panose="02040503050406030204" pitchFamily="18" charset="0"/>
+                                  </a:rPr>
+                                </m:ctrlPr>
+                              </m:dPr>
+                              <m:e>
+                                <m:r>
+                                  <a:rPr lang="en-US" altLang="zh-CN" sz="2000" b="0" i="1" smtClean="0">
+                                    <a:latin typeface="Cambria Math" panose="02040503050406030204" pitchFamily="18" charset="0"/>
+                                  </a:rPr>
+                                  <m:t>1</m:t>
+                                </m:r>
+                                <m:r>
+                                  <a:rPr lang="en-US" altLang="zh-CN" sz="2000" b="0" i="1" smtClean="0">
+                                    <a:latin typeface="Cambria Math" panose="02040503050406030204" pitchFamily="18" charset="0"/>
+                                  </a:rPr>
+                                  <m:t>−</m:t>
+                                </m:r>
+                                <m:r>
+                                  <a:rPr lang="en-US" altLang="zh-CN" sz="2000" b="0" i="1" smtClean="0">
+                                    <a:latin typeface="Cambria Math" panose="02040503050406030204" pitchFamily="18" charset="0"/>
+                                  </a:rPr>
+                                  <m:t>𝑟</m:t>
+                                </m:r>
+                              </m:e>
+                            </m:d>
+                          </m:e>
+                          <m:sup>
+                            <m:r>
+                              <a:rPr lang="en-US" altLang="zh-CN" sz="2000" b="0" i="1" smtClean="0">
+                                <a:latin typeface="Cambria Math" panose="02040503050406030204" pitchFamily="18" charset="0"/>
+                              </a:rPr>
+                              <m:t>2</m:t>
+                            </m:r>
+                          </m:sup>
+                        </m:sSup>
+                      </m:den>
+                    </m:f>
+                    <m:r>
+                      <a:rPr lang="en-US" altLang="zh-CN" sz="2000" b="0" i="1" smtClean="0">
+                        <a:latin typeface="Cambria Math" panose="02040503050406030204" pitchFamily="18" charset="0"/>
+                      </a:rPr>
+                      <m:t>=</m:t>
+                    </m:r>
+                    <m:f>
+                      <m:fPr>
+                        <m:ctrlPr>
+                          <a:rPr lang="en-US" altLang="zh-CN" sz="2000" b="0" i="1" smtClean="0">
+                            <a:latin typeface="Cambria Math" panose="02040503050406030204" pitchFamily="18" charset="0"/>
+                          </a:rPr>
+                        </m:ctrlPr>
+                      </m:fPr>
+                      <m:num>
+                        <m:r>
+                          <a:rPr lang="en-US" altLang="zh-CN" sz="2000" b="0" i="1" smtClean="0">
+                            <a:latin typeface="Cambria Math" panose="02040503050406030204" pitchFamily="18" charset="0"/>
+                          </a:rPr>
+                          <m:t>4</m:t>
+                        </m:r>
+                        <m:sSubSup>
+                          <m:sSubSupPr>
+                            <m:ctrlPr>
+                              <a:rPr lang="en-US" altLang="zh-CN" sz="2000" b="0" i="1" smtClean="0">
+                                <a:latin typeface="Cambria Math" panose="02040503050406030204" pitchFamily="18" charset="0"/>
+                              </a:rPr>
+                            </m:ctrlPr>
+                          </m:sSubSupPr>
+                          <m:e>
+                            <m:r>
+                              <a:rPr lang="en-US" altLang="zh-CN" sz="2000" b="0" i="1" smtClean="0">
+                                <a:latin typeface="Cambria Math" panose="02040503050406030204" pitchFamily="18" charset="0"/>
+                              </a:rPr>
+                              <m:t>𝐹</m:t>
+                            </m:r>
+                          </m:e>
+                          <m:sub>
+                            <m:r>
+                              <a:rPr lang="en-US" altLang="zh-CN" sz="2000" b="0" i="1" smtClean="0">
+                                <a:latin typeface="Cambria Math" panose="02040503050406030204" pitchFamily="18" charset="0"/>
+                              </a:rPr>
+                              <m:t>𝑅</m:t>
+                            </m:r>
+                          </m:sub>
+                          <m:sup>
+                            <m:r>
+                              <a:rPr lang="en-US" altLang="zh-CN" sz="2000" b="0" i="1" smtClean="0">
+                                <a:latin typeface="Cambria Math" panose="02040503050406030204" pitchFamily="18" charset="0"/>
+                              </a:rPr>
+                              <m:t>2</m:t>
+                            </m:r>
+                          </m:sup>
+                        </m:sSubSup>
+                      </m:num>
+                      <m:den>
+                        <m:sSup>
+                          <m:sSupPr>
+                            <m:ctrlPr>
+                              <a:rPr lang="en-US" altLang="zh-CN" sz="2000" b="0" i="1" smtClean="0">
+                                <a:latin typeface="Cambria Math" panose="02040503050406030204" pitchFamily="18" charset="0"/>
+                              </a:rPr>
+                            </m:ctrlPr>
+                          </m:sSupPr>
+                          <m:e>
+                            <m:r>
+                              <a:rPr lang="en-US" altLang="zh-CN" sz="2000" b="0" i="1" smtClean="0">
+                                <a:latin typeface="Cambria Math" panose="02040503050406030204" pitchFamily="18" charset="0"/>
+                              </a:rPr>
+                              <m:t>𝜋</m:t>
+                            </m:r>
+                          </m:e>
+                          <m:sup>
+                            <m:r>
+                              <a:rPr lang="en-US" altLang="zh-CN" sz="2000" b="0" i="1" smtClean="0">
+                                <a:latin typeface="Cambria Math" panose="02040503050406030204" pitchFamily="18" charset="0"/>
+                              </a:rPr>
+                              <m:t>2</m:t>
+                            </m:r>
+                          </m:sup>
+                        </m:sSup>
+                      </m:den>
+                    </m:f>
+                    <m:r>
+                      <a:rPr lang="en-US" altLang="zh-CN" sz="2000" b="0" i="1" smtClean="0">
+                        <a:latin typeface="Cambria Math" panose="02040503050406030204" pitchFamily="18" charset="0"/>
+                      </a:rPr>
+                      <m:t>,</m:t>
+                    </m:r>
+                    <m:sSub>
+                      <m:sSubPr>
+                        <m:ctrlPr>
+                          <a:rPr lang="en-US" altLang="zh-CN" sz="2000" b="0" i="1" smtClean="0">
+                            <a:latin typeface="Cambria Math" panose="02040503050406030204" pitchFamily="18" charset="0"/>
+                          </a:rPr>
+                        </m:ctrlPr>
+                      </m:sSubPr>
+                      <m:e>
+                        <m:r>
+                          <a:rPr lang="en-US" altLang="zh-CN" sz="2000" b="0" i="1" smtClean="0">
+                            <a:latin typeface="Cambria Math" panose="02040503050406030204" pitchFamily="18" charset="0"/>
+                          </a:rPr>
+                          <m:t>𝐹</m:t>
+                        </m:r>
+                      </m:e>
+                      <m:sub>
+                        <m:r>
+                          <a:rPr lang="en-US" altLang="zh-CN" sz="2000" b="0" i="1" smtClean="0">
+                            <a:latin typeface="Cambria Math" panose="02040503050406030204" pitchFamily="18" charset="0"/>
+                          </a:rPr>
+                          <m:t>𝑅</m:t>
+                        </m:r>
+                      </m:sub>
+                    </m:sSub>
+                    <m:r>
+                      <a:rPr lang="zh-CN" altLang="en-US" sz="2000" i="1">
+                        <a:latin typeface="Cambria Math" panose="02040503050406030204" pitchFamily="18" charset="0"/>
+                      </a:rPr>
+                      <m:t>为</m:t>
+                    </m:r>
+                  </m:oMath>
+                </a14:m>
+                <a:r>
+                  <a:rPr lang="zh-CN" altLang="en-US" sz="2000" dirty="0"/>
+                  <a:t>精细度，自由光谱</a:t>
+                </a:r>
+                <a14:m>
+                  <m:oMath xmlns:m="http://schemas.openxmlformats.org/officeDocument/2006/math">
+                    <m:r>
+                      <a:rPr lang="zh-CN" altLang="en-US" sz="2000" b="0" i="1" dirty="0">
+                        <a:latin typeface="Cambria Math" panose="02040503050406030204" pitchFamily="18" charset="0"/>
+                      </a:rPr>
+                      <m:t>范围</m:t>
+                    </m:r>
+                    <m:r>
+                      <a:rPr lang="en-US" altLang="zh-CN" sz="2000" b="0" i="1" smtClean="0">
+                        <a:latin typeface="Cambria Math" panose="02040503050406030204" pitchFamily="18" charset="0"/>
+                      </a:rPr>
+                      <m:t>𝐹𝑆𝑅</m:t>
+                    </m:r>
+                    <m:r>
+                      <a:rPr lang="en-US" altLang="zh-CN" sz="2000" b="0" i="1" smtClean="0">
+                        <a:latin typeface="Cambria Math" panose="02040503050406030204" pitchFamily="18" charset="0"/>
+                      </a:rPr>
+                      <m:t>=</m:t>
+                    </m:r>
+                    <m:f>
+                      <m:fPr>
+                        <m:ctrlPr>
+                          <a:rPr lang="en-US" altLang="zh-CN" sz="2000" b="0" i="1" smtClean="0">
+                            <a:latin typeface="Cambria Math" panose="02040503050406030204" pitchFamily="18" charset="0"/>
+                          </a:rPr>
+                        </m:ctrlPr>
+                      </m:fPr>
+                      <m:num>
+                        <m:r>
+                          <a:rPr lang="en-US" altLang="zh-CN" sz="2000" b="0" i="1" smtClean="0">
+                            <a:latin typeface="Cambria Math" panose="02040503050406030204" pitchFamily="18" charset="0"/>
+                          </a:rPr>
+                          <m:t>𝑐</m:t>
+                        </m:r>
+                      </m:num>
+                      <m:den>
+                        <m:r>
+                          <a:rPr lang="en-US" altLang="zh-CN" sz="2000" i="1">
+                            <a:latin typeface="Cambria Math" panose="02040503050406030204" pitchFamily="18" charset="0"/>
+                          </a:rPr>
+                          <m:t>2</m:t>
+                        </m:r>
+                        <m:r>
+                          <m:rPr>
+                            <m:sty m:val="p"/>
+                          </m:rPr>
+                          <a:rPr lang="en-US" altLang="zh-CN" sz="2000" i="1" smtClean="0">
+                            <a:latin typeface="Cambria Math" panose="02040503050406030204" pitchFamily="18" charset="0"/>
+                          </a:rPr>
+                          <m:t>n</m:t>
+                        </m:r>
+                        <m:r>
+                          <m:rPr>
+                            <m:sty m:val="p"/>
+                          </m:rPr>
+                          <a:rPr lang="en-US" altLang="zh-CN" sz="2000" i="1">
+                            <a:latin typeface="Cambria Math" panose="02040503050406030204" pitchFamily="18" charset="0"/>
+                          </a:rPr>
+                          <m:t>d</m:t>
+                        </m:r>
+                      </m:den>
+                    </m:f>
+                  </m:oMath>
+                </a14:m>
+                <a:endParaRPr lang="en-US" altLang="zh-CN" sz="2000" dirty="0"/>
+              </a:p>
+              <a:p>
+                <a:pPr marL="0" indent="0">
+                  <a:lnSpc>
+                    <a:spcPct val="100000"/>
+                  </a:lnSpc>
+                  <a:buNone/>
+                </a:pPr>
+                <a:r>
+                  <a:rPr lang="zh-CN" altLang="en-US" sz="2000" dirty="0"/>
+                  <a:t>若散射光进入标准具，认为出射光分布为散射光的光谱函数</a:t>
+                </a:r>
+                <a14:m>
+                  <m:oMath xmlns:m="http://schemas.openxmlformats.org/officeDocument/2006/math">
+                    <m:r>
+                      <a:rPr lang="en-US" altLang="zh-CN" sz="2000" i="1">
+                        <a:latin typeface="Cambria Math" panose="02040503050406030204" pitchFamily="18" charset="0"/>
+                      </a:rPr>
+                      <m:t>𝐼</m:t>
+                    </m:r>
+                    <m:d>
+                      <m:dPr>
+                        <m:ctrlPr>
+                          <a:rPr lang="en-US" altLang="zh-CN" sz="2000" i="1">
+                            <a:latin typeface="Cambria Math" panose="02040503050406030204" pitchFamily="18" charset="0"/>
+                          </a:rPr>
+                        </m:ctrlPr>
+                      </m:dPr>
+                      <m:e>
+                        <m:r>
+                          <a:rPr lang="en-US" altLang="zh-CN" sz="2000" i="1">
+                            <a:latin typeface="Cambria Math" panose="02040503050406030204" pitchFamily="18" charset="0"/>
+                          </a:rPr>
+                          <m:t>𝜈</m:t>
+                        </m:r>
+                      </m:e>
+                    </m:d>
+                  </m:oMath>
+                </a14:m>
+                <a:r>
+                  <a:rPr lang="zh-CN" altLang="en-US" sz="2000" dirty="0"/>
+                  <a:t>与标准具仪器函数</a:t>
+                </a:r>
+                <a14:m>
+                  <m:oMath xmlns:m="http://schemas.openxmlformats.org/officeDocument/2006/math">
+                    <m:r>
+                      <a:rPr lang="en-US" altLang="zh-CN" sz="2000" i="1">
+                        <a:latin typeface="Cambria Math" panose="02040503050406030204" pitchFamily="18" charset="0"/>
+                      </a:rPr>
+                      <m:t>𝐴𝑖𝑟𝑦</m:t>
+                    </m:r>
+                    <m:d>
+                      <m:dPr>
+                        <m:ctrlPr>
+                          <a:rPr lang="en-US" altLang="zh-CN" sz="2000" i="1">
+                            <a:latin typeface="Cambria Math" panose="02040503050406030204" pitchFamily="18" charset="0"/>
+                          </a:rPr>
+                        </m:ctrlPr>
+                      </m:dPr>
+                      <m:e>
+                        <m:r>
+                          <a:rPr lang="en-US" altLang="zh-CN" sz="2000" i="1">
+                            <a:latin typeface="Cambria Math" panose="02040503050406030204" pitchFamily="18" charset="0"/>
+                          </a:rPr>
+                          <m:t>𝜈</m:t>
+                        </m:r>
+                        <m:r>
+                          <a:rPr lang="en-US" altLang="zh-CN" sz="2000" i="1">
+                            <a:latin typeface="Cambria Math" panose="02040503050406030204" pitchFamily="18" charset="0"/>
+                          </a:rPr>
+                          <m:t>,</m:t>
+                        </m:r>
+                        <m:r>
+                          <a:rPr lang="en-US" altLang="zh-CN" sz="2000" i="1">
+                            <a:latin typeface="Cambria Math" panose="02040503050406030204" pitchFamily="18" charset="0"/>
+                          </a:rPr>
+                          <m:t>𝑟</m:t>
+                        </m:r>
+                      </m:e>
+                    </m:d>
+                  </m:oMath>
+                </a14:m>
+                <a:r>
+                  <a:rPr lang="zh-CN" altLang="en-US" sz="2000" dirty="0"/>
+                  <a:t>的卷积</a:t>
+                </a:r>
+                <a14:m>
+                  <m:oMath xmlns:m="http://schemas.openxmlformats.org/officeDocument/2006/math">
+                    <m:sSub>
+                      <m:sSubPr>
+                        <m:ctrlPr>
+                          <a:rPr lang="en-US" altLang="zh-CN" sz="2000" b="0" i="1" smtClean="0">
+                            <a:latin typeface="Cambria Math" panose="02040503050406030204" pitchFamily="18" charset="0"/>
+                          </a:rPr>
+                        </m:ctrlPr>
+                      </m:sSubPr>
+                      <m:e>
+                        <m:r>
+                          <a:rPr lang="en-US" altLang="zh-CN" sz="2000" b="0" i="1" smtClean="0">
+                            <a:latin typeface="Cambria Math" panose="02040503050406030204" pitchFamily="18" charset="0"/>
+                          </a:rPr>
+                          <m:t>𝐼</m:t>
+                        </m:r>
+                      </m:e>
+                      <m:sub>
+                        <m:r>
+                          <a:rPr lang="en-US" altLang="zh-CN" sz="2000" b="0" i="1" smtClean="0">
+                            <a:latin typeface="Cambria Math" panose="02040503050406030204" pitchFamily="18" charset="0"/>
+                          </a:rPr>
+                          <m:t>𝑟𝑒𝑐</m:t>
+                        </m:r>
+                      </m:sub>
+                    </m:sSub>
+                    <m:d>
+                      <m:dPr>
+                        <m:ctrlPr>
+                          <a:rPr lang="en-US" altLang="zh-CN" sz="2000" b="0" i="1" smtClean="0">
+                            <a:latin typeface="Cambria Math" panose="02040503050406030204" pitchFamily="18" charset="0"/>
+                          </a:rPr>
+                        </m:ctrlPr>
+                      </m:dPr>
+                      <m:e>
+                        <m:r>
+                          <a:rPr lang="en-US" altLang="zh-CN" sz="2000" b="0" i="1" smtClean="0">
+                            <a:latin typeface="Cambria Math" panose="02040503050406030204" pitchFamily="18" charset="0"/>
+                          </a:rPr>
+                          <m:t>𝑟</m:t>
+                        </m:r>
+                      </m:e>
+                    </m:d>
+                    <m:r>
+                      <a:rPr lang="en-US" altLang="zh-CN" sz="2000" b="0" i="1" smtClean="0">
+                        <a:latin typeface="Cambria Math" panose="02040503050406030204" pitchFamily="18" charset="0"/>
+                      </a:rPr>
+                      <m:t>=</m:t>
+                    </m:r>
+                    <m:nary>
+                      <m:naryPr>
+                        <m:ctrlPr>
+                          <a:rPr lang="en-US" altLang="zh-CN" sz="2000" b="0" i="1" smtClean="0">
+                            <a:latin typeface="Cambria Math" panose="02040503050406030204" pitchFamily="18" charset="0"/>
+                          </a:rPr>
+                        </m:ctrlPr>
+                      </m:naryPr>
+                      <m:sub>
+                        <m:r>
+                          <a:rPr lang="en-US" altLang="zh-CN" sz="2000" b="0" i="1" smtClean="0">
+                            <a:latin typeface="Cambria Math" panose="02040503050406030204" pitchFamily="18" charset="0"/>
+                          </a:rPr>
+                          <m:t>−∞</m:t>
+                        </m:r>
+                      </m:sub>
+                      <m:sup>
+                        <m:r>
+                          <a:rPr lang="en-US" altLang="zh-CN" sz="2000" b="0" i="1" smtClean="0">
+                            <a:latin typeface="Cambria Math" panose="02040503050406030204" pitchFamily="18" charset="0"/>
+                          </a:rPr>
+                          <m:t>+∞</m:t>
+                        </m:r>
+                      </m:sup>
+                      <m:e>
+                        <m:r>
+                          <a:rPr lang="en-US" altLang="zh-CN" sz="2000" b="0" i="1" smtClean="0">
+                            <a:latin typeface="Cambria Math" panose="02040503050406030204" pitchFamily="18" charset="0"/>
+                          </a:rPr>
+                          <m:t>𝐼</m:t>
+                        </m:r>
+                        <m:d>
+                          <m:dPr>
+                            <m:ctrlPr>
+                              <a:rPr lang="en-US" altLang="zh-CN" sz="2000" b="0" i="1" smtClean="0">
+                                <a:latin typeface="Cambria Math" panose="02040503050406030204" pitchFamily="18" charset="0"/>
+                              </a:rPr>
+                            </m:ctrlPr>
+                          </m:dPr>
+                          <m:e>
+                            <m:r>
+                              <a:rPr lang="en-US" altLang="zh-CN" sz="2000" b="0" i="1" smtClean="0">
+                                <a:latin typeface="Cambria Math" panose="02040503050406030204" pitchFamily="18" charset="0"/>
+                              </a:rPr>
+                              <m:t>𝜈</m:t>
+                            </m:r>
+                          </m:e>
+                        </m:d>
+                        <m:r>
+                          <a:rPr lang="en-US" altLang="zh-CN" sz="2000" b="0" i="1" smtClean="0">
+                            <a:latin typeface="Cambria Math" panose="02040503050406030204" pitchFamily="18" charset="0"/>
+                          </a:rPr>
+                          <m:t>𝐴𝑖𝑟𝑦</m:t>
+                        </m:r>
+                        <m:d>
+                          <m:dPr>
+                            <m:ctrlPr>
+                              <a:rPr lang="en-US" altLang="zh-CN" sz="2000" b="0" i="1" smtClean="0">
+                                <a:latin typeface="Cambria Math" panose="02040503050406030204" pitchFamily="18" charset="0"/>
+                              </a:rPr>
+                            </m:ctrlPr>
+                          </m:dPr>
+                          <m:e>
+                            <m:r>
+                              <a:rPr lang="en-US" altLang="zh-CN" sz="2000" b="0" i="1" smtClean="0">
+                                <a:latin typeface="Cambria Math" panose="02040503050406030204" pitchFamily="18" charset="0"/>
+                              </a:rPr>
+                              <m:t>𝜈</m:t>
+                            </m:r>
+                            <m:r>
+                              <a:rPr lang="en-US" altLang="zh-CN" sz="2000" b="0" i="1" smtClean="0">
+                                <a:latin typeface="Cambria Math" panose="02040503050406030204" pitchFamily="18" charset="0"/>
+                              </a:rPr>
+                              <m:t>,</m:t>
+                            </m:r>
+                            <m:r>
+                              <a:rPr lang="en-US" altLang="zh-CN" sz="2000" b="0" i="1" smtClean="0">
+                                <a:latin typeface="Cambria Math" panose="02040503050406030204" pitchFamily="18" charset="0"/>
+                              </a:rPr>
+                              <m:t>𝑟</m:t>
+                            </m:r>
+                          </m:e>
+                        </m:d>
+                        <m:r>
+                          <m:rPr>
+                            <m:sty m:val="p"/>
+                          </m:rPr>
+                          <a:rPr lang="en-US" altLang="zh-CN" sz="2000" b="0" i="1" smtClean="0">
+                            <a:latin typeface="Cambria Math" panose="02040503050406030204" pitchFamily="18" charset="0"/>
+                          </a:rPr>
+                          <m:t>d</m:t>
+                        </m:r>
+                        <m:r>
+                          <a:rPr lang="en-US" altLang="zh-CN" sz="2000" b="0" i="1" smtClean="0">
+                            <a:latin typeface="Cambria Math" panose="02040503050406030204" pitchFamily="18" charset="0"/>
+                          </a:rPr>
+                          <m:t>𝜈</m:t>
+                        </m:r>
+                      </m:e>
+                    </m:nary>
+                  </m:oMath>
+                </a14:m>
+                <a:r>
+                  <a:rPr lang="zh-CN" altLang="en-US" sz="2000" dirty="0"/>
+                  <a:t>。理论上作反卷积可以得到光谱函数。</a:t>
+                </a:r>
+                <a:endParaRPr lang="en-US" altLang="zh-CN" sz="2000" dirty="0"/>
+              </a:p>
+              <a:p>
+                <a:pPr marL="0" indent="0">
+                  <a:lnSpc>
+                    <a:spcPct val="100000"/>
+                  </a:lnSpc>
+                  <a:buNone/>
+                </a:pPr>
+                <a:r>
+                  <a:rPr lang="zh-CN" altLang="en-US" sz="2000" dirty="0"/>
+                  <a:t>预设使用</a:t>
+                </a:r>
+                <a:r>
+                  <a:rPr lang="en-US" altLang="zh-CN" sz="2000" dirty="0" err="1"/>
+                  <a:t>Lightmachinery</a:t>
+                </a:r>
+                <a:r>
+                  <a:rPr lang="zh-CN" altLang="en-US" sz="2000" dirty="0"/>
+                  <a:t>的</a:t>
+                </a:r>
+                <a:r>
+                  <a:rPr lang="en-US" altLang="zh-CN" sz="2000" dirty="0"/>
+                  <a:t>Silica</a:t>
+                </a:r>
+                <a:r>
+                  <a:rPr lang="zh-CN" altLang="en-US" sz="2000" dirty="0"/>
+                  <a:t>标准具搭建如图所示光路对</a:t>
+                </a:r>
+                <a:r>
+                  <a:rPr lang="en-US" altLang="zh-CN" sz="2000" dirty="0"/>
+                  <a:t>90°</a:t>
+                </a:r>
+                <a:r>
+                  <a:rPr lang="zh-CN" altLang="en-US" sz="2000" dirty="0"/>
+                  <a:t>散射光进行探测。</a:t>
+                </a:r>
+                <a:endParaRPr lang="en-US" altLang="zh-CN" sz="2000" dirty="0"/>
+              </a:p>
+              <a:p>
+                <a:pPr marL="0" indent="0">
+                  <a:buNone/>
+                </a:pPr>
+                <a:endParaRPr lang="en-US" altLang="zh-CN" sz="2000" dirty="0"/>
+              </a:p>
+              <a:p>
+                <a:pPr marL="0" indent="0">
+                  <a:lnSpc>
+                    <a:spcPct val="100000"/>
+                  </a:lnSpc>
+                  <a:buNone/>
+                </a:pPr>
+                <a:endParaRPr lang="en-US" altLang="zh-CN" sz="2000" dirty="0"/>
+              </a:p>
+            </p:txBody>
+          </p:sp>
+        </mc:Choice>
+        <mc:Fallback>
+          <p:sp>
+            <p:nvSpPr>
+              <p:cNvPr id="12" name="内容占位符 11"/>
+              <p:cNvSpPr>
+                <a:spLocks noRot="1" noChangeAspect="1" noMove="1" noResize="1" noEditPoints="1" noAdjustHandles="1" noChangeArrowheads="1" noChangeShapeType="1" noTextEdit="1"/>
+              </p:cNvSpPr>
+              <p:nvPr>
+                <p:ph idx="1"/>
+              </p:nvPr>
+            </p:nvSpPr>
+            <p:spPr>
+              <a:xfrm>
+                <a:off x="193857" y="1254403"/>
+                <a:ext cx="7806381" cy="5250347"/>
+              </a:xfrm>
+              <a:blipFill rotWithShape="1">
+                <a:blip r:embed="rId2"/>
+                <a:stretch>
+                  <a:fillRect l="-67" t="-102" r="-59" b="-88"/>
+                </a:stretch>
+              </a:blipFill>
+              <a:ln>
+                <a:solidFill>
+                  <a:schemeClr val="bg1"/>
+                </a:solidFill>
+              </a:ln>
+            </p:spPr>
+            <p:txBody>
+              <a:bodyPr/>
+              <a:lstStyle/>
+              <a:p>
+                <a:r>
+                  <a:rPr lang="zh-CN" altLang="en-US">
+                    <a:noFill/>
+                  </a:rPr>
+                  <a:t> </a:t>
+                </a:r>
+              </a:p>
+            </p:txBody>
+          </p:sp>
+        </mc:Fallback>
+      </mc:AlternateContent>
       <p:pic>
         <p:nvPicPr>
-          <p:cNvPr id="8" name="图片 7">
-            <a:extLst>
-              <a:ext uri="{FF2B5EF4-FFF2-40B4-BE49-F238E27FC236}">
-                <a16:creationId xmlns:a16="http://schemas.microsoft.com/office/drawing/2014/main" id="{B5F3BDA3-D1C3-9428-014D-1A6A758968B2}"/>
-              </a:ext>
-            </a:extLst>
-          </p:cNvPr>
+          <p:cNvPr id="15" name="图片 14"/>
           <p:cNvPicPr>
-            <a:picLocks/>
+            <a:picLocks noChangeAspect="1"/>
           </p:cNvPicPr>
           <p:nvPr/>
         </p:nvPicPr>
         <p:blipFill>
-          <a:blip r:embed="rId4"/>
-          <a:srcRect l="3988" t="4372" r="2516" b="6873"/>
+          <a:blip r:embed="rId3"/>
           <a:stretch>
             <a:fillRect/>
           </a:stretch>
         </p:blipFill>
         <p:spPr>
           <a:xfrm>
-            <a:off x="441159" y="1918932"/>
-            <a:ext cx="7416824" cy="1440160"/>
+            <a:off x="7896200" y="1316091"/>
+            <a:ext cx="4176464" cy="1773970"/>
+          </a:xfrm>
+          <a:prstGeom prst="rect">
+            <a:avLst/>
+          </a:prstGeom>
+        </p:spPr>
+      </p:pic>
+      <p:grpSp>
+        <p:nvGrpSpPr>
+          <p:cNvPr id="46" name="组合 45"/>
+          <p:cNvGrpSpPr/>
+          <p:nvPr/>
+        </p:nvGrpSpPr>
+        <p:grpSpPr>
+          <a:xfrm>
+            <a:off x="8544272" y="3164325"/>
+            <a:ext cx="3341826" cy="2995992"/>
+            <a:chOff x="9632505" y="1246300"/>
+            <a:chExt cx="2362764" cy="2138461"/>
+          </a:xfrm>
+        </p:grpSpPr>
+        <p:grpSp>
+          <p:nvGrpSpPr>
+            <p:cNvPr id="9" name="组合 8"/>
+            <p:cNvGrpSpPr/>
+            <p:nvPr/>
+          </p:nvGrpSpPr>
+          <p:grpSpPr>
+            <a:xfrm rot="16200000">
+              <a:off x="10423077" y="2027717"/>
+              <a:ext cx="2138461" cy="575627"/>
+              <a:chOff x="2818396" y="2559603"/>
+              <a:chExt cx="3368691" cy="861996"/>
+            </a:xfrm>
+          </p:grpSpPr>
+          <p:sp>
+            <p:nvSpPr>
+              <p:cNvPr id="6" name="椭圆 5"/>
+              <p:cNvSpPr/>
+              <p:nvPr/>
+            </p:nvSpPr>
+            <p:spPr>
+              <a:xfrm>
+                <a:off x="2818396" y="2609353"/>
+                <a:ext cx="767988" cy="725836"/>
+              </a:xfrm>
+              <a:prstGeom prst="ellipse">
+                <a:avLst/>
+              </a:prstGeom>
+            </p:spPr>
+            <p:style>
+              <a:lnRef idx="2">
+                <a:schemeClr val="accent1">
+                  <a:shade val="15000"/>
+                </a:schemeClr>
+              </a:lnRef>
+              <a:fillRef idx="1">
+                <a:schemeClr val="accent1"/>
+              </a:fillRef>
+              <a:effectRef idx="0">
+                <a:schemeClr val="accent1"/>
+              </a:effectRef>
+              <a:fontRef idx="minor">
+                <a:schemeClr val="lt1"/>
+              </a:fontRef>
+            </p:style>
+            <p:txBody>
+              <a:bodyPr rtlCol="0" anchor="ctr"/>
+              <a:lstStyle/>
+              <a:p>
+                <a:pPr algn="ctr"/>
+                <a:endParaRPr lang="zh-CN" altLang="en-US" dirty="0"/>
+              </a:p>
+            </p:txBody>
+          </p:sp>
+          <p:sp>
+            <p:nvSpPr>
+              <p:cNvPr id="2" name="矩形 1"/>
+              <p:cNvSpPr/>
+              <p:nvPr/>
+            </p:nvSpPr>
+            <p:spPr>
+              <a:xfrm rot="5400000">
+                <a:off x="5503958" y="2652060"/>
+                <a:ext cx="684518" cy="681740"/>
+              </a:xfrm>
+              <a:prstGeom prst="rect">
+                <a:avLst/>
+              </a:prstGeom>
+            </p:spPr>
+            <p:style>
+              <a:lnRef idx="2">
+                <a:schemeClr val="accent1">
+                  <a:shade val="15000"/>
+                </a:schemeClr>
+              </a:lnRef>
+              <a:fillRef idx="1">
+                <a:schemeClr val="accent1"/>
+              </a:fillRef>
+              <a:effectRef idx="0">
+                <a:schemeClr val="accent1"/>
+              </a:effectRef>
+              <a:fontRef idx="minor">
+                <a:schemeClr val="lt1"/>
+              </a:fontRef>
+            </p:style>
+            <p:txBody>
+              <a:bodyPr rtlCol="0" anchor="ctr"/>
+              <a:lstStyle/>
+              <a:p>
+                <a:pPr algn="ctr"/>
+                <a:r>
+                  <a:rPr lang="zh-CN" altLang="en-US" sz="700" dirty="0"/>
+                  <a:t>激光器</a:t>
+                </a:r>
+                <a:endParaRPr lang="zh-CN" altLang="en-US" sz="700" dirty="0"/>
+              </a:p>
+            </p:txBody>
+          </p:sp>
+          <p:sp>
+            <p:nvSpPr>
+              <p:cNvPr id="4" name="椭圆 3"/>
+              <p:cNvSpPr/>
+              <p:nvPr/>
+            </p:nvSpPr>
+            <p:spPr>
+              <a:xfrm>
+                <a:off x="4728483" y="2671390"/>
+                <a:ext cx="72008" cy="666016"/>
+              </a:xfrm>
+              <a:prstGeom prst="ellipse">
+                <a:avLst/>
+              </a:prstGeom>
+              <a:ln>
+                <a:solidFill>
+                  <a:schemeClr val="tx1"/>
+                </a:solidFill>
+              </a:ln>
+            </p:spPr>
+            <p:style>
+              <a:lnRef idx="2">
+                <a:schemeClr val="accent6"/>
+              </a:lnRef>
+              <a:fillRef idx="1">
+                <a:schemeClr val="lt1"/>
+              </a:fillRef>
+              <a:effectRef idx="0">
+                <a:schemeClr val="accent6"/>
+              </a:effectRef>
+              <a:fontRef idx="minor">
+                <a:schemeClr val="dk1"/>
+              </a:fontRef>
+            </p:style>
+            <p:txBody>
+              <a:bodyPr rtlCol="0" anchor="ctr"/>
+              <a:lstStyle/>
+              <a:p>
+                <a:pPr algn="ctr"/>
+                <a:endParaRPr lang="zh-CN" altLang="en-US">
+                  <a:ln w="0"/>
+                  <a:solidFill>
+                    <a:schemeClr val="tx1"/>
+                  </a:solidFill>
+                  <a:effectLst>
+                    <a:outerShdw blurRad="38100" dist="19050" dir="2700000" algn="tl" rotWithShape="0">
+                      <a:schemeClr val="dk1">
+                        <a:alpha val="40000"/>
+                      </a:schemeClr>
+                    </a:outerShdw>
+                  </a:effectLst>
+                </a:endParaRPr>
+              </a:p>
+            </p:txBody>
+          </p:sp>
+          <p:sp>
+            <p:nvSpPr>
+              <p:cNvPr id="5" name="椭圆 4"/>
+              <p:cNvSpPr/>
+              <p:nvPr/>
+            </p:nvSpPr>
+            <p:spPr>
+              <a:xfrm>
+                <a:off x="4114582" y="2559603"/>
+                <a:ext cx="45720" cy="861996"/>
+              </a:xfrm>
+              <a:prstGeom prst="ellipse">
+                <a:avLst/>
+              </a:prstGeom>
+              <a:ln>
+                <a:solidFill>
+                  <a:schemeClr val="tx1"/>
+                </a:solidFill>
+              </a:ln>
+            </p:spPr>
+            <p:style>
+              <a:lnRef idx="2">
+                <a:schemeClr val="accent6"/>
+              </a:lnRef>
+              <a:fillRef idx="1">
+                <a:schemeClr val="lt1"/>
+              </a:fillRef>
+              <a:effectRef idx="0">
+                <a:schemeClr val="accent6"/>
+              </a:effectRef>
+              <a:fontRef idx="minor">
+                <a:schemeClr val="dk1"/>
+              </a:fontRef>
+            </p:style>
+            <p:txBody>
+              <a:bodyPr rtlCol="0" anchor="ctr"/>
+              <a:lstStyle/>
+              <a:p>
+                <a:pPr algn="ctr"/>
+                <a:endParaRPr lang="zh-CN" altLang="en-US"/>
+              </a:p>
+            </p:txBody>
+          </p:sp>
+          <p:cxnSp>
+            <p:nvCxnSpPr>
+              <p:cNvPr id="25" name="直接连接符 24"/>
+              <p:cNvCxnSpPr/>
+              <p:nvPr/>
+            </p:nvCxnSpPr>
+            <p:spPr>
+              <a:xfrm flipH="1">
+                <a:off x="4800491" y="3001469"/>
+                <a:ext cx="685909" cy="2929"/>
+              </a:xfrm>
+              <a:prstGeom prst="line">
+                <a:avLst/>
+              </a:prstGeom>
+            </p:spPr>
+            <p:style>
+              <a:lnRef idx="1">
+                <a:schemeClr val="accent1"/>
+              </a:lnRef>
+              <a:fillRef idx="0">
+                <a:schemeClr val="accent1"/>
+              </a:fillRef>
+              <a:effectRef idx="0">
+                <a:schemeClr val="accent1"/>
+              </a:effectRef>
+              <a:fontRef idx="minor">
+                <a:schemeClr val="tx1"/>
+              </a:fontRef>
+            </p:style>
+          </p:cxnSp>
+          <p:sp>
+            <p:nvSpPr>
+              <p:cNvPr id="7" name="任意多边形: 形状 6"/>
+              <p:cNvSpPr/>
+              <p:nvPr/>
+            </p:nvSpPr>
+            <p:spPr>
+              <a:xfrm>
+                <a:off x="3297718" y="2609353"/>
+                <a:ext cx="1476705" cy="774700"/>
+              </a:xfrm>
+              <a:custGeom>
+                <a:avLst/>
+                <a:gdLst>
+                  <a:gd name="csX0" fmla="*/ 1402080 w 1402080"/>
+                  <a:gd name="csY0" fmla="*/ 398780 h 774700"/>
+                  <a:gd name="csX1" fmla="*/ 800100 w 1402080"/>
+                  <a:gd name="csY1" fmla="*/ 0 h 774700"/>
+                  <a:gd name="csX2" fmla="*/ 0 w 1402080"/>
+                  <a:gd name="csY2" fmla="*/ 368300 h 774700"/>
+                  <a:gd name="csX3" fmla="*/ 797560 w 1402080"/>
+                  <a:gd name="csY3" fmla="*/ 774700 h 774700"/>
+                  <a:gd name="csX4" fmla="*/ 1402080 w 1402080"/>
+                  <a:gd name="csY4" fmla="*/ 398780 h 774700"/>
+                </a:gdLst>
+                <a:ahLst/>
+                <a:cxnLst>
+                  <a:cxn ang="0">
+                    <a:pos x="csX0" y="csY0"/>
+                  </a:cxn>
+                  <a:cxn ang="0">
+                    <a:pos x="csX1" y="csY1"/>
+                  </a:cxn>
+                  <a:cxn ang="0">
+                    <a:pos x="csX2" y="csY2"/>
+                  </a:cxn>
+                  <a:cxn ang="0">
+                    <a:pos x="csX3" y="csY3"/>
+                  </a:cxn>
+                  <a:cxn ang="0">
+                    <a:pos x="csX4" y="csY4"/>
+                  </a:cxn>
+                </a:cxnLst>
+                <a:rect l="l" t="t" r="r" b="b"/>
+                <a:pathLst>
+                  <a:path w="1402080" h="774700">
+                    <a:moveTo>
+                      <a:pt x="1402080" y="398780"/>
+                    </a:moveTo>
+                    <a:lnTo>
+                      <a:pt x="800100" y="0"/>
+                    </a:lnTo>
+                    <a:lnTo>
+                      <a:pt x="0" y="368300"/>
+                    </a:lnTo>
+                    <a:lnTo>
+                      <a:pt x="797560" y="774700"/>
+                    </a:lnTo>
+                    <a:lnTo>
+                      <a:pt x="1402080" y="398780"/>
+                    </a:lnTo>
+                    <a:close/>
+                  </a:path>
+                </a:pathLst>
+              </a:custGeom>
+              <a:noFill/>
+              <a:ln>
+                <a:solidFill>
+                  <a:schemeClr val="accent5"/>
+                </a:solidFill>
+              </a:ln>
+            </p:spPr>
+            <p:style>
+              <a:lnRef idx="2">
+                <a:schemeClr val="accent1">
+                  <a:shade val="15000"/>
+                </a:schemeClr>
+              </a:lnRef>
+              <a:fillRef idx="1">
+                <a:schemeClr val="accent1"/>
+              </a:fillRef>
+              <a:effectRef idx="0">
+                <a:schemeClr val="accent1"/>
+              </a:effectRef>
+              <a:fontRef idx="minor">
+                <a:schemeClr val="lt1"/>
+              </a:fontRef>
+            </p:style>
+            <p:txBody>
+              <a:bodyPr rtlCol="0" anchor="ctr"/>
+              <a:lstStyle/>
+              <a:p>
+                <a:pPr algn="ctr"/>
+                <a:endParaRPr lang="zh-CN" altLang="en-US" sz="1600"/>
+              </a:p>
+            </p:txBody>
+          </p:sp>
+        </p:grpSp>
+        <p:grpSp>
+          <p:nvGrpSpPr>
+            <p:cNvPr id="18" name="组合 17"/>
+            <p:cNvGrpSpPr/>
+            <p:nvPr/>
+          </p:nvGrpSpPr>
+          <p:grpSpPr>
+            <a:xfrm rot="10800000">
+              <a:off x="9912424" y="2849351"/>
+              <a:ext cx="1556546" cy="470675"/>
+              <a:chOff x="3380704" y="2565705"/>
+              <a:chExt cx="2105696" cy="861996"/>
+            </a:xfrm>
+          </p:grpSpPr>
+          <p:sp>
+            <p:nvSpPr>
+              <p:cNvPr id="21" name="椭圆 20"/>
+              <p:cNvSpPr/>
+              <p:nvPr/>
+            </p:nvSpPr>
+            <p:spPr>
+              <a:xfrm>
+                <a:off x="4728483" y="2671390"/>
+                <a:ext cx="72008" cy="666016"/>
+              </a:xfrm>
+              <a:prstGeom prst="ellipse">
+                <a:avLst/>
+              </a:prstGeom>
+              <a:ln>
+                <a:solidFill>
+                  <a:schemeClr val="tx1"/>
+                </a:solidFill>
+              </a:ln>
+            </p:spPr>
+            <p:style>
+              <a:lnRef idx="2">
+                <a:schemeClr val="accent6"/>
+              </a:lnRef>
+              <a:fillRef idx="1">
+                <a:schemeClr val="lt1"/>
+              </a:fillRef>
+              <a:effectRef idx="0">
+                <a:schemeClr val="accent6"/>
+              </a:effectRef>
+              <a:fontRef idx="minor">
+                <a:schemeClr val="dk1"/>
+              </a:fontRef>
+            </p:style>
+            <p:txBody>
+              <a:bodyPr rtlCol="0" anchor="ctr"/>
+              <a:lstStyle/>
+              <a:p>
+                <a:pPr algn="ctr"/>
+                <a:endParaRPr lang="zh-CN" altLang="en-US">
+                  <a:ln w="0"/>
+                  <a:solidFill>
+                    <a:schemeClr val="tx1"/>
+                  </a:solidFill>
+                  <a:effectLst>
+                    <a:outerShdw blurRad="38100" dist="19050" dir="2700000" algn="tl" rotWithShape="0">
+                      <a:schemeClr val="dk1">
+                        <a:alpha val="40000"/>
+                      </a:schemeClr>
+                    </a:outerShdw>
+                  </a:effectLst>
+                </a:endParaRPr>
+              </a:p>
+            </p:txBody>
+          </p:sp>
+          <p:sp>
+            <p:nvSpPr>
+              <p:cNvPr id="22" name="椭圆 21"/>
+              <p:cNvSpPr/>
+              <p:nvPr/>
+            </p:nvSpPr>
+            <p:spPr>
+              <a:xfrm>
+                <a:off x="4157542" y="2565705"/>
+                <a:ext cx="45720" cy="861996"/>
+              </a:xfrm>
+              <a:prstGeom prst="ellipse">
+                <a:avLst/>
+              </a:prstGeom>
+              <a:ln>
+                <a:solidFill>
+                  <a:schemeClr val="tx1"/>
+                </a:solidFill>
+              </a:ln>
+            </p:spPr>
+            <p:style>
+              <a:lnRef idx="2">
+                <a:schemeClr val="accent6"/>
+              </a:lnRef>
+              <a:fillRef idx="1">
+                <a:schemeClr val="lt1"/>
+              </a:fillRef>
+              <a:effectRef idx="0">
+                <a:schemeClr val="accent6"/>
+              </a:effectRef>
+              <a:fontRef idx="minor">
+                <a:schemeClr val="dk1"/>
+              </a:fontRef>
+            </p:style>
+            <p:txBody>
+              <a:bodyPr rtlCol="0" anchor="ctr"/>
+              <a:lstStyle/>
+              <a:p>
+                <a:pPr algn="ctr"/>
+                <a:endParaRPr lang="zh-CN" altLang="en-US"/>
+              </a:p>
+            </p:txBody>
+          </p:sp>
+          <p:cxnSp>
+            <p:nvCxnSpPr>
+              <p:cNvPr id="23" name="直接连接符 22"/>
+              <p:cNvCxnSpPr/>
+              <p:nvPr/>
+            </p:nvCxnSpPr>
+            <p:spPr>
+              <a:xfrm flipH="1">
+                <a:off x="4800491" y="3001469"/>
+                <a:ext cx="685909" cy="2929"/>
+              </a:xfrm>
+              <a:prstGeom prst="line">
+                <a:avLst/>
+              </a:prstGeom>
+            </p:spPr>
+            <p:style>
+              <a:lnRef idx="1">
+                <a:schemeClr val="accent1"/>
+              </a:lnRef>
+              <a:fillRef idx="0">
+                <a:schemeClr val="accent1"/>
+              </a:fillRef>
+              <a:effectRef idx="0">
+                <a:schemeClr val="accent1"/>
+              </a:effectRef>
+              <a:fontRef idx="minor">
+                <a:schemeClr val="tx1"/>
+              </a:fontRef>
+            </p:style>
+          </p:cxnSp>
+          <p:sp>
+            <p:nvSpPr>
+              <p:cNvPr id="24" name="任意多边形: 形状 23"/>
+              <p:cNvSpPr/>
+              <p:nvPr/>
+            </p:nvSpPr>
+            <p:spPr>
+              <a:xfrm>
+                <a:off x="3380704" y="2609353"/>
+                <a:ext cx="1393717" cy="774700"/>
+              </a:xfrm>
+              <a:custGeom>
+                <a:avLst/>
+                <a:gdLst>
+                  <a:gd name="csX0" fmla="*/ 1402080 w 1402080"/>
+                  <a:gd name="csY0" fmla="*/ 398780 h 774700"/>
+                  <a:gd name="csX1" fmla="*/ 800100 w 1402080"/>
+                  <a:gd name="csY1" fmla="*/ 0 h 774700"/>
+                  <a:gd name="csX2" fmla="*/ 0 w 1402080"/>
+                  <a:gd name="csY2" fmla="*/ 368300 h 774700"/>
+                  <a:gd name="csX3" fmla="*/ 797560 w 1402080"/>
+                  <a:gd name="csY3" fmla="*/ 774700 h 774700"/>
+                  <a:gd name="csX4" fmla="*/ 1402080 w 1402080"/>
+                  <a:gd name="csY4" fmla="*/ 398780 h 774700"/>
+                </a:gdLst>
+                <a:ahLst/>
+                <a:cxnLst>
+                  <a:cxn ang="0">
+                    <a:pos x="csX0" y="csY0"/>
+                  </a:cxn>
+                  <a:cxn ang="0">
+                    <a:pos x="csX1" y="csY1"/>
+                  </a:cxn>
+                  <a:cxn ang="0">
+                    <a:pos x="csX2" y="csY2"/>
+                  </a:cxn>
+                  <a:cxn ang="0">
+                    <a:pos x="csX3" y="csY3"/>
+                  </a:cxn>
+                  <a:cxn ang="0">
+                    <a:pos x="csX4" y="csY4"/>
+                  </a:cxn>
+                </a:cxnLst>
+                <a:rect l="l" t="t" r="r" b="b"/>
+                <a:pathLst>
+                  <a:path w="1402080" h="774700">
+                    <a:moveTo>
+                      <a:pt x="1402080" y="398780"/>
+                    </a:moveTo>
+                    <a:lnTo>
+                      <a:pt x="800100" y="0"/>
+                    </a:lnTo>
+                    <a:lnTo>
+                      <a:pt x="0" y="368300"/>
+                    </a:lnTo>
+                    <a:lnTo>
+                      <a:pt x="797560" y="774700"/>
+                    </a:lnTo>
+                    <a:lnTo>
+                      <a:pt x="1402080" y="398780"/>
+                    </a:lnTo>
+                    <a:close/>
+                  </a:path>
+                </a:pathLst>
+              </a:custGeom>
+              <a:noFill/>
+              <a:ln>
+                <a:solidFill>
+                  <a:schemeClr val="accent5"/>
+                </a:solidFill>
+              </a:ln>
+            </p:spPr>
+            <p:style>
+              <a:lnRef idx="2">
+                <a:schemeClr val="accent1">
+                  <a:shade val="15000"/>
+                </a:schemeClr>
+              </a:lnRef>
+              <a:fillRef idx="1">
+                <a:schemeClr val="accent1"/>
+              </a:fillRef>
+              <a:effectRef idx="0">
+                <a:schemeClr val="accent1"/>
+              </a:effectRef>
+              <a:fontRef idx="minor">
+                <a:schemeClr val="lt1"/>
+              </a:fontRef>
+            </p:style>
+            <p:txBody>
+              <a:bodyPr rtlCol="0" anchor="ctr"/>
+              <a:lstStyle/>
+              <a:p>
+                <a:pPr algn="ctr"/>
+                <a:endParaRPr lang="zh-CN" altLang="en-US" sz="1600"/>
+              </a:p>
+            </p:txBody>
+          </p:sp>
+        </p:grpSp>
+        <p:cxnSp>
+          <p:nvCxnSpPr>
+            <p:cNvPr id="30" name="直接连接符 29"/>
+            <p:cNvCxnSpPr/>
+            <p:nvPr/>
+          </p:nvCxnSpPr>
+          <p:spPr>
+            <a:xfrm>
+              <a:off x="9776303" y="2937902"/>
+              <a:ext cx="288032" cy="337375"/>
+            </a:xfrm>
+            <a:prstGeom prst="line">
+              <a:avLst/>
+            </a:prstGeom>
+          </p:spPr>
+          <p:style>
+            <a:lnRef idx="3">
+              <a:schemeClr val="dk1"/>
+            </a:lnRef>
+            <a:fillRef idx="0">
+              <a:schemeClr val="dk1"/>
+            </a:fillRef>
+            <a:effectRef idx="2">
+              <a:schemeClr val="dk1"/>
+            </a:effectRef>
+            <a:fontRef idx="minor">
+              <a:schemeClr val="tx1"/>
+            </a:fontRef>
+          </p:style>
+        </p:cxnSp>
+        <p:cxnSp>
+          <p:nvCxnSpPr>
+            <p:cNvPr id="32" name="直接连接符 31"/>
+            <p:cNvCxnSpPr/>
+            <p:nvPr/>
+          </p:nvCxnSpPr>
+          <p:spPr>
+            <a:xfrm flipV="1">
+              <a:off x="9912424" y="1908810"/>
+              <a:ext cx="0" cy="1171676"/>
+            </a:xfrm>
+            <a:prstGeom prst="line">
+              <a:avLst/>
+            </a:prstGeom>
+          </p:spPr>
+          <p:style>
+            <a:lnRef idx="1">
+              <a:schemeClr val="accent1"/>
+            </a:lnRef>
+            <a:fillRef idx="0">
+              <a:schemeClr val="accent1"/>
+            </a:fillRef>
+            <a:effectRef idx="0">
+              <a:schemeClr val="accent1"/>
+            </a:effectRef>
+            <a:fontRef idx="minor">
+              <a:schemeClr val="tx1"/>
+            </a:fontRef>
+          </p:style>
+        </p:cxnSp>
+        <p:sp>
+          <p:nvSpPr>
+            <p:cNvPr id="33" name="矩形 32"/>
+            <p:cNvSpPr/>
+            <p:nvPr/>
+          </p:nvSpPr>
+          <p:spPr>
+            <a:xfrm flipV="1">
+              <a:off x="9696401" y="2443328"/>
+              <a:ext cx="432046" cy="45719"/>
+            </a:xfrm>
+            <a:prstGeom prst="rect">
+              <a:avLst/>
+            </a:prstGeom>
+            <a:ln>
+              <a:solidFill>
+                <a:schemeClr val="tx1"/>
+              </a:solidFill>
+            </a:ln>
+          </p:spPr>
+          <p:style>
+            <a:lnRef idx="2">
+              <a:schemeClr val="accent6"/>
+            </a:lnRef>
+            <a:fillRef idx="1">
+              <a:schemeClr val="lt1"/>
+            </a:fillRef>
+            <a:effectRef idx="0">
+              <a:schemeClr val="accent6"/>
+            </a:effectRef>
+            <a:fontRef idx="minor">
+              <a:schemeClr val="dk1"/>
+            </a:fontRef>
+          </p:style>
+          <p:txBody>
+            <a:bodyPr rtlCol="0" anchor="ctr"/>
+            <a:lstStyle/>
+            <a:p>
+              <a:pPr algn="ctr"/>
+              <a:endParaRPr lang="zh-CN" altLang="en-US"/>
+            </a:p>
+          </p:txBody>
+        </p:sp>
+        <p:sp>
+          <p:nvSpPr>
+            <p:cNvPr id="35" name="矩形 34"/>
+            <p:cNvSpPr/>
+            <p:nvPr/>
+          </p:nvSpPr>
+          <p:spPr>
+            <a:xfrm flipV="1">
+              <a:off x="9696401" y="2349177"/>
+              <a:ext cx="432046" cy="45719"/>
+            </a:xfrm>
+            <a:prstGeom prst="rect">
+              <a:avLst/>
+            </a:prstGeom>
+            <a:ln>
+              <a:solidFill>
+                <a:schemeClr val="tx1"/>
+              </a:solidFill>
+            </a:ln>
+          </p:spPr>
+          <p:style>
+            <a:lnRef idx="2">
+              <a:schemeClr val="accent6"/>
+            </a:lnRef>
+            <a:fillRef idx="1">
+              <a:schemeClr val="lt1"/>
+            </a:fillRef>
+            <a:effectRef idx="0">
+              <a:schemeClr val="accent6"/>
+            </a:effectRef>
+            <a:fontRef idx="minor">
+              <a:schemeClr val="dk1"/>
+            </a:fontRef>
+          </p:style>
+          <p:txBody>
+            <a:bodyPr rtlCol="0" anchor="ctr"/>
+            <a:lstStyle/>
+            <a:p>
+              <a:pPr algn="ctr"/>
+              <a:endParaRPr lang="zh-CN" altLang="en-US"/>
+            </a:p>
+          </p:txBody>
+        </p:sp>
+        <p:sp>
+          <p:nvSpPr>
+            <p:cNvPr id="38" name="椭圆 37"/>
+            <p:cNvSpPr/>
+            <p:nvPr/>
+          </p:nvSpPr>
+          <p:spPr>
+            <a:xfrm rot="16200000">
+              <a:off x="9905807" y="1867422"/>
+              <a:ext cx="29023" cy="575627"/>
+            </a:xfrm>
+            <a:prstGeom prst="ellipse">
+              <a:avLst/>
+            </a:prstGeom>
+            <a:ln>
+              <a:solidFill>
+                <a:schemeClr val="tx1"/>
+              </a:solidFill>
+            </a:ln>
+          </p:spPr>
+          <p:style>
+            <a:lnRef idx="2">
+              <a:schemeClr val="accent6"/>
+            </a:lnRef>
+            <a:fillRef idx="1">
+              <a:schemeClr val="lt1"/>
+            </a:fillRef>
+            <a:effectRef idx="0">
+              <a:schemeClr val="accent6"/>
+            </a:effectRef>
+            <a:fontRef idx="minor">
+              <a:schemeClr val="dk1"/>
+            </a:fontRef>
+          </p:style>
+          <p:txBody>
+            <a:bodyPr rtlCol="0" anchor="ctr"/>
+            <a:lstStyle/>
+            <a:p>
+              <a:pPr algn="ctr"/>
+              <a:endParaRPr lang="zh-CN" altLang="en-US"/>
+            </a:p>
+          </p:txBody>
+        </p:sp>
+        <p:sp>
+          <p:nvSpPr>
+            <p:cNvPr id="43" name="矩形 42"/>
+            <p:cNvSpPr/>
+            <p:nvPr/>
+          </p:nvSpPr>
+          <p:spPr>
+            <a:xfrm>
+              <a:off x="9693226" y="1610102"/>
+              <a:ext cx="438396" cy="297108"/>
+            </a:xfrm>
+            <a:prstGeom prst="rect">
+              <a:avLst/>
+            </a:prstGeom>
+          </p:spPr>
+          <p:style>
+            <a:lnRef idx="2">
+              <a:schemeClr val="accent1">
+                <a:shade val="15000"/>
+              </a:schemeClr>
+            </a:lnRef>
+            <a:fillRef idx="1">
+              <a:schemeClr val="accent1"/>
+            </a:fillRef>
+            <a:effectRef idx="0">
+              <a:schemeClr val="accent1"/>
+            </a:effectRef>
+            <a:fontRef idx="minor">
+              <a:schemeClr val="lt1"/>
+            </a:fontRef>
+          </p:style>
+          <p:txBody>
+            <a:bodyPr rtlCol="0" anchor="ctr"/>
+            <a:lstStyle/>
+            <a:p>
+              <a:pPr algn="ctr"/>
+              <a:r>
+                <a:rPr lang="en-US" altLang="zh-CN" sz="700" dirty="0" err="1"/>
+                <a:t>iCCD</a:t>
+              </a:r>
+              <a:endParaRPr lang="zh-CN" altLang="en-US" sz="700" dirty="0"/>
+            </a:p>
+          </p:txBody>
+        </p:sp>
+        <p:sp>
+          <p:nvSpPr>
+            <p:cNvPr id="44" name="文本框 43"/>
+            <p:cNvSpPr txBox="1"/>
+            <p:nvPr/>
+          </p:nvSpPr>
+          <p:spPr>
+            <a:xfrm>
+              <a:off x="10099677" y="2323887"/>
+              <a:ext cx="415498" cy="184666"/>
+            </a:xfrm>
+            <a:prstGeom prst="rect">
+              <a:avLst/>
+            </a:prstGeom>
+            <a:noFill/>
+          </p:spPr>
+          <p:txBody>
+            <a:bodyPr wrap="none" rtlCol="0">
+              <a:spAutoFit/>
+            </a:bodyPr>
+            <a:lstStyle/>
+            <a:p>
+              <a:r>
+                <a:rPr lang="zh-CN" altLang="en-US" sz="600" dirty="0"/>
+                <a:t>标准具</a:t>
+              </a:r>
+              <a:endParaRPr lang="zh-CN" altLang="en-US" sz="600" dirty="0"/>
+            </a:p>
+          </p:txBody>
+        </p:sp>
+        <p:sp>
+          <p:nvSpPr>
+            <p:cNvPr id="45" name="文本框 44"/>
+            <p:cNvSpPr txBox="1"/>
+            <p:nvPr/>
+          </p:nvSpPr>
+          <p:spPr>
+            <a:xfrm>
+              <a:off x="11682363" y="3056361"/>
+              <a:ext cx="312906" cy="169277"/>
+            </a:xfrm>
+            <a:prstGeom prst="rect">
+              <a:avLst/>
+            </a:prstGeom>
+            <a:noFill/>
+          </p:spPr>
+          <p:txBody>
+            <a:bodyPr wrap="none" rtlCol="0">
+              <a:spAutoFit/>
+            </a:bodyPr>
+            <a:lstStyle/>
+            <a:p>
+              <a:r>
+                <a:rPr lang="zh-CN" altLang="en-US" sz="500" dirty="0"/>
+                <a:t>样品</a:t>
+              </a:r>
+              <a:endParaRPr lang="zh-CN" altLang="en-US" sz="500" dirty="0"/>
+            </a:p>
+          </p:txBody>
+        </p:sp>
+      </p:grpSp>
+      <p:pic>
+        <p:nvPicPr>
+          <p:cNvPr id="48" name="图片 47"/>
+          <p:cNvPicPr/>
+          <p:nvPr/>
+        </p:nvPicPr>
+        <p:blipFill>
+          <a:blip r:embed="rId4"/>
+          <a:srcRect l="3380" t="7952" r="28714" b="12932"/>
+          <a:stretch>
+            <a:fillRect/>
+          </a:stretch>
+        </p:blipFill>
+        <p:spPr>
+          <a:xfrm>
+            <a:off x="3162590" y="2420888"/>
+            <a:ext cx="1762727" cy="451768"/>
           </a:xfrm>
           <a:prstGeom prst="rect">
             <a:avLst/>
@@ -4712,28 +6139,21 @@
       </p:pic>
       <p:pic>
         <p:nvPicPr>
-          <p:cNvPr id="10" name="图片 9">
-            <a:extLst>
-              <a:ext uri="{FF2B5EF4-FFF2-40B4-BE49-F238E27FC236}">
-                <a16:creationId xmlns:a16="http://schemas.microsoft.com/office/drawing/2014/main" id="{36826468-3546-B075-A267-4BA816DB17B1}"/>
-              </a:ext>
-            </a:extLst>
-          </p:cNvPr>
-          <p:cNvPicPr>
-            <a:picLocks noChangeAspect="1"/>
-          </p:cNvPicPr>
+          <p:cNvPr id="50" name="图片 49"/>
+          <p:cNvPicPr/>
           <p:nvPr/>
         </p:nvPicPr>
         <p:blipFill>
           <a:blip r:embed="rId5"/>
+          <a:srcRect l="3988" t="4372" r="2516" b="6873"/>
           <a:stretch>
             <a:fillRect/>
           </a:stretch>
         </p:blipFill>
         <p:spPr>
           <a:xfrm>
-            <a:off x="8544272" y="1195404"/>
-            <a:ext cx="2110731" cy="2163688"/>
+            <a:off x="201347" y="5734026"/>
+            <a:ext cx="3950437" cy="909275"/>
           </a:xfrm>
           <a:prstGeom prst="rect">
             <a:avLst/>
@@ -4742,13 +6162,7 @@
       </p:pic>
       <p:pic>
         <p:nvPicPr>
-          <p:cNvPr id="13" name="图片 12">
-            <a:extLst>
-              <a:ext uri="{FF2B5EF4-FFF2-40B4-BE49-F238E27FC236}">
-                <a16:creationId xmlns:a16="http://schemas.microsoft.com/office/drawing/2014/main" id="{C5580D58-7669-B794-FB65-3DE184CFD43B}"/>
-              </a:ext>
-            </a:extLst>
-          </p:cNvPr>
+          <p:cNvPr id="52" name="图片 51"/>
           <p:cNvPicPr>
             <a:picLocks noChangeAspect="1"/>
           </p:cNvPicPr>
@@ -4762,113 +6176,15 @@
         </p:blipFill>
         <p:spPr>
           <a:xfrm>
-            <a:off x="7896200" y="3498908"/>
-            <a:ext cx="3948202" cy="3076521"/>
+            <a:off x="4179041" y="5776376"/>
+            <a:ext cx="749089" cy="767883"/>
           </a:xfrm>
           <a:prstGeom prst="rect">
             <a:avLst/>
           </a:prstGeom>
         </p:spPr>
       </p:pic>
-      <p:pic>
-        <p:nvPicPr>
-          <p:cNvPr id="15" name="图片 14">
-            <a:extLst>
-              <a:ext uri="{FF2B5EF4-FFF2-40B4-BE49-F238E27FC236}">
-                <a16:creationId xmlns:a16="http://schemas.microsoft.com/office/drawing/2014/main" id="{10819545-E1A4-2E0F-39D2-BC949BD08626}"/>
-              </a:ext>
-            </a:extLst>
-          </p:cNvPr>
-          <p:cNvPicPr>
-            <a:picLocks noChangeAspect="1"/>
-          </p:cNvPicPr>
-          <p:nvPr/>
-        </p:nvPicPr>
-        <p:blipFill>
-          <a:blip r:embed="rId7"/>
-          <a:stretch>
-            <a:fillRect/>
-          </a:stretch>
-        </p:blipFill>
-        <p:spPr>
-          <a:xfrm>
-            <a:off x="767408" y="3598893"/>
-            <a:ext cx="6772275" cy="2876550"/>
-          </a:xfrm>
-          <a:prstGeom prst="rect">
-            <a:avLst/>
-          </a:prstGeom>
-        </p:spPr>
-      </p:pic>
-      <p:sp>
-        <p:nvSpPr>
-          <p:cNvPr id="17" name="文本框 16">
-            <a:extLst>
-              <a:ext uri="{FF2B5EF4-FFF2-40B4-BE49-F238E27FC236}">
-                <a16:creationId xmlns:a16="http://schemas.microsoft.com/office/drawing/2014/main" id="{FCA19EC3-50D1-E266-95EC-F2363531953D}"/>
-              </a:ext>
-            </a:extLst>
-          </p:cNvPr>
-          <p:cNvSpPr txBox="1"/>
-          <p:nvPr/>
-        </p:nvSpPr>
-        <p:spPr>
-          <a:xfrm>
-            <a:off x="164480" y="6475443"/>
-            <a:ext cx="4680520" cy="307777"/>
-          </a:xfrm>
-          <a:prstGeom prst="rect">
-            <a:avLst/>
-          </a:prstGeom>
-          <a:noFill/>
-        </p:spPr>
-        <p:txBody>
-          <a:bodyPr wrap="square">
-            <a:spAutoFit/>
-          </a:bodyPr>
-          <a:lstStyle/>
-          <a:p>
-            <a:pPr fontAlgn="base"/>
-            <a:r>
-              <a:rPr lang="zh-CN" altLang="zh-CN" sz="700" b="0" i="0" dirty="0">
-                <a:solidFill>
-                  <a:schemeClr val="tx1"/>
-                </a:solidFill>
-                <a:effectLst/>
-                <a:latin typeface="+mn-lt"/>
-              </a:rPr>
-              <a:t>Experimental analysis on the rapid measurement of a high precision Brillouin scattering spectrum in water using a Fabry–Pérot etalon</a:t>
-            </a:r>
-            <a:r>
-              <a:rPr lang="en-US" altLang="zh-CN" sz="700" dirty="0"/>
-              <a:t>: </a:t>
-            </a:r>
-            <a:r>
-              <a:rPr lang="en-US" altLang="zh-CN" sz="700" dirty="0">
-                <a:hlinkClick r:id="rId8"/>
-              </a:rPr>
-              <a:t>http://dx.doi.org/10.1088/1612-2011/13/5/055701</a:t>
-            </a:r>
-            <a:r>
-              <a:rPr lang="en-US" altLang="zh-CN" sz="700" dirty="0"/>
-              <a:t> </a:t>
-            </a:r>
-            <a:endParaRPr lang="zh-CN" altLang="zh-CN" sz="700" b="0" i="0" dirty="0">
-              <a:solidFill>
-                <a:srgbClr val="333333"/>
-              </a:solidFill>
-              <a:effectLst/>
-              <a:latin typeface="-apple-system"/>
-            </a:endParaRPr>
-          </a:p>
-        </p:txBody>
-      </p:sp>
     </p:spTree>
-    <p:extLst>
-      <p:ext uri="{BB962C8B-B14F-4D97-AF65-F5344CB8AC3E}">
-        <p14:creationId xmlns:p14="http://schemas.microsoft.com/office/powerpoint/2010/main" val="3367216877"/>
-      </p:ext>
-    </p:extLst>
   </p:cSld>
   <p:clrMapOvr>
     <a:masterClrMapping/>
@@ -4876,352 +6192,10 @@
 </p:sld>
 </file>
 
-<file path=ppt/slides/slide4.xml><?xml version="1.0" encoding="utf-8"?>
-<p:sld xmlns:a="http://schemas.openxmlformats.org/drawingml/2006/main" xmlns:r="http://schemas.openxmlformats.org/officeDocument/2006/relationships" xmlns:p="http://schemas.openxmlformats.org/presentationml/2006/main">
-  <p:cSld>
-    <p:bg>
-      <p:bgPr>
-        <a:blipFill dpi="0" rotWithShape="1">
-          <a:blip r:embed="rId3">
-            <a:lum/>
-          </a:blip>
-          <a:srcRect/>
-          <a:stretch>
-            <a:fillRect/>
-          </a:stretch>
-        </a:blipFill>
-        <a:effectLst/>
-      </p:bgPr>
-    </p:bg>
-    <p:spTree>
-      <p:nvGrpSpPr>
-        <p:cNvPr id="1" name="">
-          <a:extLst>
-            <a:ext uri="{FF2B5EF4-FFF2-40B4-BE49-F238E27FC236}">
-              <a16:creationId xmlns:a16="http://schemas.microsoft.com/office/drawing/2014/main" id="{05E52190-70B0-F3B2-1F3B-72EAA5C44452}"/>
-            </a:ext>
-          </a:extLst>
-        </p:cNvPr>
-        <p:cNvGrpSpPr/>
-        <p:nvPr/>
-      </p:nvGrpSpPr>
-      <p:grpSpPr>
-        <a:xfrm>
-          <a:off x="0" y="0"/>
-          <a:ext cx="0" cy="0"/>
-          <a:chOff x="0" y="0"/>
-          <a:chExt cx="0" cy="0"/>
-        </a:xfrm>
-      </p:grpSpPr>
-      <p:sp>
-        <p:nvSpPr>
-          <p:cNvPr id="2" name="Rectangle 11">
-            <a:extLst>
-              <a:ext uri="{FF2B5EF4-FFF2-40B4-BE49-F238E27FC236}">
-                <a16:creationId xmlns:a16="http://schemas.microsoft.com/office/drawing/2014/main" id="{01DC6E0B-5B1A-A49A-81BC-24D335EE7832}"/>
-              </a:ext>
-            </a:extLst>
-          </p:cNvPr>
-          <p:cNvSpPr txBox="1">
-            <a:spLocks noChangeArrowheads="1"/>
-          </p:cNvSpPr>
-          <p:nvPr/>
-        </p:nvSpPr>
-        <p:spPr>
-          <a:xfrm>
-            <a:off x="457200" y="228600"/>
-            <a:ext cx="5029200" cy="563562"/>
-          </a:xfrm>
-          <a:prstGeom prst="rect">
-            <a:avLst/>
-          </a:prstGeom>
-        </p:spPr>
-        <p:txBody>
-          <a:bodyPr vert="horz" lIns="91440" tIns="45720" rIns="91440" bIns="45720" rtlCol="0" anchor="ctr">
-            <a:normAutofit fontScale="90000" lnSpcReduction="10000"/>
-          </a:bodyPr>
-          <a:lstStyle>
-            <a:lvl1pPr algn="l" defTabSz="914400" rtl="0" eaLnBrk="1" latinLnBrk="0" hangingPunct="1">
-              <a:lnSpc>
-                <a:spcPct val="90000"/>
-              </a:lnSpc>
-              <a:spcBef>
-                <a:spcPct val="0"/>
-              </a:spcBef>
-              <a:buNone/>
-              <a:defRPr sz="4400" kern="1200">
-                <a:solidFill>
-                  <a:schemeClr val="tx1"/>
-                </a:solidFill>
-                <a:latin typeface="+mj-lt"/>
-                <a:ea typeface="+mj-ea"/>
-                <a:cs typeface="+mj-cs"/>
-              </a:defRPr>
-            </a:lvl1pPr>
-          </a:lstStyle>
-          <a:p>
-            <a:r>
-              <a:rPr lang="en-US" altLang="zh-CN" sz="4000" dirty="0">
-                <a:solidFill>
-                  <a:schemeClr val="bg1"/>
-                </a:solidFill>
-                <a:latin typeface="华文中宋" panose="02010600040101010101" pitchFamily="2" charset="-122"/>
-                <a:ea typeface="华文中宋" panose="02010600040101010101" pitchFamily="2" charset="-122"/>
-              </a:rPr>
-              <a:t>VIPA</a:t>
-            </a:r>
-            <a:endParaRPr lang="zh-CN" altLang="zh-CN" sz="4000" dirty="0">
-              <a:solidFill>
-                <a:schemeClr val="bg1"/>
-              </a:solidFill>
-              <a:latin typeface="华文中宋" panose="02010600040101010101" pitchFamily="2" charset="-122"/>
-              <a:ea typeface="华文中宋" panose="02010600040101010101" pitchFamily="2" charset="-122"/>
-            </a:endParaRPr>
-          </a:p>
-        </p:txBody>
-      </p:sp>
-      <p:sp>
-        <p:nvSpPr>
-          <p:cNvPr id="8" name="文本框 7">
-            <a:extLst>
-              <a:ext uri="{FF2B5EF4-FFF2-40B4-BE49-F238E27FC236}">
-                <a16:creationId xmlns:a16="http://schemas.microsoft.com/office/drawing/2014/main" id="{79D819EB-5D70-C605-3357-C6E250A7EF73}"/>
-              </a:ext>
-            </a:extLst>
-          </p:cNvPr>
-          <p:cNvSpPr txBox="1"/>
-          <p:nvPr/>
-        </p:nvSpPr>
-        <p:spPr>
-          <a:xfrm>
-            <a:off x="119336" y="6447940"/>
-            <a:ext cx="10873208" cy="360227"/>
-          </a:xfrm>
-          <a:prstGeom prst="rect">
-            <a:avLst/>
-          </a:prstGeom>
-          <a:noFill/>
-        </p:spPr>
-        <p:txBody>
-          <a:bodyPr wrap="square">
-            <a:spAutoFit/>
-          </a:bodyPr>
-          <a:lstStyle/>
-          <a:p>
-            <a:pPr>
-              <a:lnSpc>
-                <a:spcPts val="2400"/>
-              </a:lnSpc>
-            </a:pPr>
-            <a:r>
-              <a:rPr lang="en-US" altLang="zh-CN" sz="1100" dirty="0">
-                <a:solidFill>
-                  <a:srgbClr val="000000"/>
-                </a:solidFill>
-                <a:latin typeface="Noto Sans" panose="020B0502040504020204" pitchFamily="34" charset="0"/>
-              </a:rPr>
-              <a:t>Angle dependence of Brillouin scattering intensity in Liquids </a:t>
-            </a:r>
-            <a:r>
-              <a:rPr lang="zh-CN" altLang="en-US" sz="1100" dirty="0">
-                <a:hlinkClick r:id="rId4"/>
-              </a:rPr>
-              <a:t>https://doi.org/10.1364/OL.557682</a:t>
-            </a:r>
-            <a:r>
-              <a:rPr lang="en-US" altLang="zh-CN" sz="1100" dirty="0">
-                <a:solidFill>
-                  <a:srgbClr val="000000"/>
-                </a:solidFill>
-                <a:latin typeface="Noto Sans" panose="020B0502040504020204" pitchFamily="34" charset="0"/>
-              </a:rPr>
-              <a:t> </a:t>
-            </a:r>
-            <a:endParaRPr lang="zh-CN" altLang="en-US" sz="1100" dirty="0"/>
-          </a:p>
-        </p:txBody>
-      </p:sp>
-      <p:sp>
-        <p:nvSpPr>
-          <p:cNvPr id="3" name="内容占位符 2">
-            <a:extLst>
-              <a:ext uri="{FF2B5EF4-FFF2-40B4-BE49-F238E27FC236}">
-                <a16:creationId xmlns:a16="http://schemas.microsoft.com/office/drawing/2014/main" id="{0C7E74BB-83C3-6971-0CB5-674E643E91C5}"/>
-              </a:ext>
-            </a:extLst>
-          </p:cNvPr>
-          <p:cNvSpPr>
-            <a:spLocks noGrp="1"/>
-          </p:cNvSpPr>
-          <p:nvPr>
-            <p:ph idx="1"/>
-          </p:nvPr>
-        </p:nvSpPr>
-        <p:spPr>
-          <a:xfrm>
-            <a:off x="839416" y="1757954"/>
-            <a:ext cx="6679872" cy="1510769"/>
-          </a:xfrm>
-        </p:spPr>
-        <p:txBody>
-          <a:bodyPr>
-            <a:normAutofit/>
-          </a:bodyPr>
-          <a:lstStyle/>
-          <a:p>
-            <a:pPr marL="0" indent="0">
-              <a:buNone/>
-            </a:pPr>
-            <a:r>
-              <a:rPr lang="en-US" altLang="zh-CN" sz="2400" dirty="0"/>
-              <a:t>VIPA</a:t>
-            </a:r>
-            <a:r>
-              <a:rPr lang="zh-CN" altLang="en-US" sz="2400" dirty="0"/>
-              <a:t>虚拟成像相位阵列，</a:t>
-            </a:r>
-            <a:r>
-              <a:rPr lang="en-US" altLang="zh-CN" sz="2400" dirty="0" err="1"/>
-              <a:t>Lightmachinery</a:t>
-            </a:r>
-            <a:r>
-              <a:rPr lang="zh-CN" altLang="en-US" sz="2400" dirty="0"/>
-              <a:t>的</a:t>
-            </a:r>
-            <a:r>
-              <a:rPr lang="en-US" altLang="zh-CN" sz="2400" dirty="0"/>
-              <a:t>VIPA</a:t>
-            </a:r>
-            <a:r>
-              <a:rPr lang="zh-CN" altLang="en-US" sz="2400" dirty="0"/>
-              <a:t>，自由光谱范围</a:t>
-            </a:r>
-            <a:r>
-              <a:rPr lang="en-US" altLang="zh-CN" sz="2400" dirty="0"/>
-              <a:t>15GHz</a:t>
-            </a:r>
-            <a:r>
-              <a:rPr lang="zh-CN" altLang="en-US" sz="2400" dirty="0"/>
-              <a:t>，</a:t>
-            </a:r>
-            <a:r>
-              <a:rPr lang="it-IT" altLang="zh-CN" sz="2400" dirty="0"/>
-              <a:t> </a:t>
-            </a:r>
-            <a:r>
-              <a:rPr lang="zh-CN" altLang="en-US" sz="2400" dirty="0"/>
-              <a:t>分辨率约</a:t>
-            </a:r>
-            <a:r>
-              <a:rPr lang="en-US" altLang="zh-CN" sz="2400" dirty="0"/>
-              <a:t>400MHz</a:t>
-            </a:r>
-            <a:endParaRPr lang="zh-CN" altLang="en-US" sz="2000" dirty="0"/>
-          </a:p>
-        </p:txBody>
-      </p:sp>
-      <p:pic>
-        <p:nvPicPr>
-          <p:cNvPr id="11" name="图片 10">
-            <a:extLst>
-              <a:ext uri="{FF2B5EF4-FFF2-40B4-BE49-F238E27FC236}">
-                <a16:creationId xmlns:a16="http://schemas.microsoft.com/office/drawing/2014/main" id="{54B921C2-858F-5626-D125-F8EDC34CB942}"/>
-              </a:ext>
-            </a:extLst>
-          </p:cNvPr>
-          <p:cNvPicPr>
-            <a:picLocks noChangeAspect="1"/>
-          </p:cNvPicPr>
-          <p:nvPr/>
-        </p:nvPicPr>
-        <p:blipFill>
-          <a:blip r:embed="rId5"/>
-          <a:stretch>
-            <a:fillRect/>
-          </a:stretch>
-        </p:blipFill>
-        <p:spPr>
-          <a:xfrm>
-            <a:off x="6600056" y="3820899"/>
-            <a:ext cx="5452790" cy="2305853"/>
-          </a:xfrm>
-          <a:prstGeom prst="rect">
-            <a:avLst/>
-          </a:prstGeom>
-        </p:spPr>
-      </p:pic>
-      <p:pic>
-        <p:nvPicPr>
-          <p:cNvPr id="9" name="图片 8">
-            <a:extLst>
-              <a:ext uri="{FF2B5EF4-FFF2-40B4-BE49-F238E27FC236}">
-                <a16:creationId xmlns:a16="http://schemas.microsoft.com/office/drawing/2014/main" id="{6467C979-3812-678B-4BA3-8D50ED6F9531}"/>
-              </a:ext>
-            </a:extLst>
-          </p:cNvPr>
-          <p:cNvPicPr>
-            <a:picLocks/>
-          </p:cNvPicPr>
-          <p:nvPr/>
-        </p:nvPicPr>
-        <p:blipFill>
-          <a:blip r:embed="rId6"/>
-          <a:srcRect r="32836"/>
-          <a:stretch>
-            <a:fillRect/>
-          </a:stretch>
-        </p:blipFill>
-        <p:spPr>
-          <a:xfrm>
-            <a:off x="7896200" y="1420244"/>
-            <a:ext cx="3240360" cy="1848479"/>
-          </a:xfrm>
-          <a:prstGeom prst="rect">
-            <a:avLst/>
-          </a:prstGeom>
-        </p:spPr>
-      </p:pic>
-      <p:pic>
-        <p:nvPicPr>
-          <p:cNvPr id="12" name="图片 11">
-            <a:extLst>
-              <a:ext uri="{FF2B5EF4-FFF2-40B4-BE49-F238E27FC236}">
-                <a16:creationId xmlns:a16="http://schemas.microsoft.com/office/drawing/2014/main" id="{3D85BCEF-9029-FA56-0C56-01AC58B199E3}"/>
-              </a:ext>
-            </a:extLst>
-          </p:cNvPr>
-          <p:cNvPicPr>
-            <a:picLocks noChangeAspect="1"/>
-          </p:cNvPicPr>
-          <p:nvPr/>
-        </p:nvPicPr>
-        <p:blipFill>
-          <a:blip r:embed="rId7"/>
-          <a:stretch>
-            <a:fillRect/>
-          </a:stretch>
-        </p:blipFill>
-        <p:spPr>
-          <a:xfrm>
-            <a:off x="767408" y="3589278"/>
-            <a:ext cx="5775240" cy="2577751"/>
-          </a:xfrm>
-          <a:prstGeom prst="rect">
-            <a:avLst/>
-          </a:prstGeom>
-        </p:spPr>
-      </p:pic>
-    </p:spTree>
-    <p:extLst>
-      <p:ext uri="{BB962C8B-B14F-4D97-AF65-F5344CB8AC3E}">
-        <p14:creationId xmlns:p14="http://schemas.microsoft.com/office/powerpoint/2010/main" val="86445807"/>
-      </p:ext>
-    </p:extLst>
-  </p:cSld>
-  <p:clrMapOvr>
-    <a:masterClrMapping/>
-  </p:clrMapOvr>
-</p:sld>
+<file path=ppt/tags/tag1.xml><?xml version="1.0" encoding="utf-8"?>
+<p:tagLst xmlns:p="http://schemas.openxmlformats.org/presentationml/2006/main">
+  <p:tag name="OPCH-44E06C3073AB993ED521E87E97D34A547D93DE2C34D5D6D77543C882D827C964" val="[{&quot;GradientColorId&quot;:&quot;&quot;,&quot;IsFree&quot;:true,&quot;IsGradient&quot;:false,&quot;ImagePath&quot;:&quot;&quot;,&quot;GradientColor&quot;:null,&quot;SimpleColor&quot;:&quot;#000000&quot;}]"/>
+</p:tagLst>
 </file>
 
 <file path=ppt/theme/theme1.xml><?xml version="1.0" encoding="utf-8"?>
@@ -5267,7 +6241,7 @@
     </a:clrScheme>
     <a:fontScheme name="Office 主题​​">
       <a:majorFont>
-        <a:latin typeface="Calibri Light" panose="020F0302020204030204"/>
+        <a:latin typeface="Calibri Light"/>
         <a:ea typeface=""/>
         <a:cs typeface=""/>
         <a:font script="Jpan" typeface="游ゴシック Light"/>
@@ -5302,7 +6276,7 @@
         <a:font script="Geor" typeface="Sylfaen"/>
       </a:majorFont>
       <a:minorFont>
-        <a:latin typeface="Calibri" panose="020F0502020204030204"/>
+        <a:latin typeface="Calibri"/>
         <a:ea typeface=""/>
         <a:cs typeface=""/>
         <a:font script="Jpan" typeface="游ゴシック"/>
@@ -5475,8 +6449,6 @@
       </a:bgFillStyleLst>
     </a:fmtScheme>
   </a:themeElements>
-  <a:objectDefaults/>
-  <a:extraClrSchemeLst/>
   <a:extLst>
     <a:ext uri="{05A4C25C-085E-4340-85A3-A5531E510DB2}">
       <thm15:themeFamily xmlns:thm15="http://schemas.microsoft.com/office/thememl/2012/main" name="Office Theme" id="{62F939B6-93AF-4DB8-9C6B-D6C7DFDC589F}" vid="{4A3C46E8-61CC-4603-A589-7422A47A8E4A}"/>
@@ -5528,7 +6500,7 @@
     </a:clrScheme>
     <a:fontScheme name="Office">
       <a:majorFont>
-        <a:latin typeface="等线 Light" panose="020F0302020204030204"/>
+        <a:latin typeface="等线 Light"/>
         <a:ea typeface=""/>
         <a:cs typeface=""/>
         <a:font script="Jpan" typeface="游ゴシック Light"/>
@@ -5561,26 +6533,9 @@
         <a:font script="Viet" typeface="Times New Roman"/>
         <a:font script="Uigh" typeface="Microsoft Uighur"/>
         <a:font script="Geor" typeface="Sylfaen"/>
-        <a:font script="Armn" typeface="Arial"/>
-        <a:font script="Bugi" typeface="Leelawadee UI"/>
-        <a:font script="Bopo" typeface="Microsoft JhengHei"/>
-        <a:font script="Java" typeface="Javanese Text"/>
-        <a:font script="Lisu" typeface="Segoe UI"/>
-        <a:font script="Mymr" typeface="Myanmar Text"/>
-        <a:font script="Nkoo" typeface="Ebrima"/>
-        <a:font script="Olck" typeface="Nirmala UI"/>
-        <a:font script="Osma" typeface="Ebrima"/>
-        <a:font script="Phag" typeface="Phagspa"/>
-        <a:font script="Syrn" typeface="Estrangelo Edessa"/>
-        <a:font script="Syrj" typeface="Estrangelo Edessa"/>
-        <a:font script="Syre" typeface="Estrangelo Edessa"/>
-        <a:font script="Sora" typeface="Nirmala UI"/>
-        <a:font script="Tale" typeface="Microsoft Tai Le"/>
-        <a:font script="Talu" typeface="Microsoft New Tai Lue"/>
-        <a:font script="Tfng" typeface="Ebrima"/>
       </a:majorFont>
       <a:minorFont>
-        <a:latin typeface="等线" panose="020F0502020204030204"/>
+        <a:latin typeface="等线"/>
         <a:ea typeface=""/>
         <a:cs typeface=""/>
         <a:font script="Jpan" typeface="游ゴシック"/>
@@ -5613,23 +6568,6 @@
         <a:font script="Viet" typeface="Arial"/>
         <a:font script="Uigh" typeface="Microsoft Uighur"/>
         <a:font script="Geor" typeface="Sylfaen"/>
-        <a:font script="Armn" typeface="Arial"/>
-        <a:font script="Bugi" typeface="Leelawadee UI"/>
-        <a:font script="Bopo" typeface="Microsoft JhengHei"/>
-        <a:font script="Java" typeface="Javanese Text"/>
-        <a:font script="Lisu" typeface="Segoe UI"/>
-        <a:font script="Mymr" typeface="Myanmar Text"/>
-        <a:font script="Nkoo" typeface="Ebrima"/>
-        <a:font script="Olck" typeface="Nirmala UI"/>
-        <a:font script="Osma" typeface="Ebrima"/>
-        <a:font script="Phag" typeface="Phagspa"/>
-        <a:font script="Syrn" typeface="Estrangelo Edessa"/>
-        <a:font script="Syrj" typeface="Estrangelo Edessa"/>
-        <a:font script="Syre" typeface="Estrangelo Edessa"/>
-        <a:font script="Sora" typeface="Nirmala UI"/>
-        <a:font script="Tale" typeface="Microsoft Tai Le"/>
-        <a:font script="Talu" typeface="Microsoft New Tai Lue"/>
-        <a:font script="Tfng" typeface="Ebrima"/>
       </a:minorFont>
     </a:fontScheme>
     <a:fmtScheme name="Office">
@@ -5770,8 +6708,6 @@
       </a:bgFillStyleLst>
     </a:fmtScheme>
   </a:themeElements>
-  <a:objectDefaults/>
-  <a:extraClrSchemeLst/>
   <a:extLst>
     <a:ext uri="{05A4C25C-085E-4340-85A3-A5531E510DB2}">
       <thm15:themeFamily xmlns:thm15="http://schemas.microsoft.com/office/thememl/2012/main" name="Office Theme" id="{62F939B6-93AF-4DB8-9C6B-D6C7DFDC589F}" vid="{4A3C46E8-61CC-4603-A589-7422A47A8E4A}"/>
